--- a/doc/IOCFC26/forecastSegmentation.pptx
+++ b/doc/IOCFC26/forecastSegmentation.pptx
@@ -32223,35 +32223,55 @@
               <a:t>Given a </a:t>
             </a:r>
             <a:r>
-              <a:rPr lang="it-IT" sz="2400" dirty="0" err="1"/>
+              <a:rPr lang="it-IT" sz="2400" i="1" dirty="0" err="1"/>
               <a:t>univariate</a:t>
             </a:r>
             <a:r>
-              <a:rPr lang="it-IT" sz="2400" dirty="0"/>
+              <a:rPr lang="it-IT" sz="2400" i="1" dirty="0"/>
               <a:t> time </a:t>
             </a:r>
             <a:r>
-              <a:rPr lang="it-IT" sz="2400" dirty="0" err="1"/>
+              <a:rPr lang="it-IT" sz="2400" i="1" dirty="0" err="1"/>
               <a:t>series</a:t>
             </a:r>
             <a:r>
-              <a:rPr lang="it-IT" sz="2400" dirty="0"/>
-              <a:t> T, </a:t>
+              <a:rPr lang="it-IT" sz="2400" i="1" dirty="0"/>
+              <a:t> </a:t>
             </a:r>
             <a:r>
-              <a:rPr lang="it-IT" sz="2400" dirty="0" err="1"/>
+              <a:rPr lang="it-IT" sz="2400" dirty="0"/>
+              <a:t>T, </a:t>
+            </a:r>
+            <a:r>
+              <a:rPr lang="it-IT" sz="2400" dirty="0" err="1">
+                <a:solidFill>
+                  <a:schemeClr val="accent2"/>
+                </a:solidFill>
+              </a:rPr>
               <a:t>changepoint</a:t>
             </a:r>
             <a:r>
-              <a:rPr lang="it-IT" sz="2400" dirty="0"/>
+              <a:rPr lang="it-IT" sz="2400" dirty="0">
+                <a:solidFill>
+                  <a:schemeClr val="accent2"/>
+                </a:solidFill>
+              </a:rPr>
               <a:t> </a:t>
             </a:r>
             <a:r>
-              <a:rPr lang="it-IT" sz="2400" dirty="0" err="1"/>
+              <a:rPr lang="it-IT" sz="2400" dirty="0" err="1">
+                <a:solidFill>
+                  <a:schemeClr val="accent2"/>
+                </a:solidFill>
+              </a:rPr>
               <a:t>detection</a:t>
             </a:r>
             <a:r>
-              <a:rPr lang="it-IT" sz="2400" dirty="0"/>
+              <a:rPr lang="it-IT" sz="2400" dirty="0">
+                <a:solidFill>
+                  <a:schemeClr val="accent2"/>
+                </a:solidFill>
+              </a:rPr>
               <a:t> </a:t>
             </a:r>
             <a:r>
@@ -32270,13 +32290,37 @@
           <a:p>
             <a:r>
               <a:rPr lang="en-US" sz="2400" dirty="0"/>
-              <a:t>Most common use case is linear piecewise approximation, where the subseries between changepoints are approximated by best fit linear segments.</a:t>
+              <a:t>Most common use case is </a:t>
+            </a:r>
+            <a:r>
+              <a:rPr lang="en-US" sz="2400" dirty="0">
+                <a:solidFill>
+                  <a:schemeClr val="accent2"/>
+                </a:solidFill>
+              </a:rPr>
+              <a:t>linear piecewise approximation</a:t>
+            </a:r>
+            <a:r>
+              <a:rPr lang="en-US" sz="2400" dirty="0"/>
+              <a:t>, where the subseries between changepoints are approximated by best fit linear segments.</a:t>
             </a:r>
           </a:p>
           <a:p>
             <a:r>
               <a:rPr lang="en-US" sz="2400" dirty="0"/>
-              <a:t>State-of-the-art methods are implemented in the ruptures package (Truong et al., 2020). Two DP-based examples: </a:t>
+              <a:t>State-of-the-art methods are implemented in the </a:t>
+            </a:r>
+            <a:r>
+              <a:rPr lang="en-US" sz="2400" dirty="0">
+                <a:solidFill>
+                  <a:schemeClr val="accent2"/>
+                </a:solidFill>
+              </a:rPr>
+              <a:t>ruptures package </a:t>
+            </a:r>
+            <a:r>
+              <a:rPr lang="en-US" sz="2400" dirty="0"/>
+              <a:t>(Truong et al., 2020). Two DP-based examples: </a:t>
             </a:r>
           </a:p>
           <a:p>
@@ -32479,7 +32523,11 @@
               </a:spcBef>
             </a:pPr>
             <a:r>
-              <a:rPr lang="en-US" sz="2200" b="1" dirty="0"/>
+              <a:rPr lang="en-US" sz="2200" b="1" dirty="0">
+                <a:solidFill>
+                  <a:schemeClr val="accent2"/>
+                </a:solidFill>
+              </a:rPr>
               <a:t>Changepoint detection </a:t>
             </a:r>
             <a:r>
@@ -32494,7 +32542,11 @@
               </a:spcBef>
             </a:pPr>
             <a:r>
-              <a:rPr lang="en-US" sz="2200" b="1" dirty="0"/>
+              <a:rPr lang="en-US" sz="2200" b="1" dirty="0">
+                <a:solidFill>
+                  <a:schemeClr val="accent2"/>
+                </a:solidFill>
+              </a:rPr>
               <a:t>Regime-switching </a:t>
             </a:r>
             <a:r>
@@ -32522,8 +32574,24 @@
               <a:buChar char="•"/>
             </a:pPr>
             <a:r>
+              <a:rPr lang="en-US" sz="2200" dirty="0">
+                <a:solidFill>
+                  <a:schemeClr val="accent2"/>
+                </a:solidFill>
+              </a:rPr>
+              <a:t>Threshold-based</a:t>
+            </a:r>
+            <a:r>
               <a:rPr lang="en-US" sz="2200" dirty="0"/>
-              <a:t>Threshold-based (deterministic switching rule). SETAR (Tong 1978/1990), TAR, STAR: the AR regime in force at time t is determined by whether a lagged value of the series crosses a threshold (or smoothly transitions in case of STAR).</a:t>
+              <a:t> (</a:t>
+            </a:r>
+            <a:r>
+              <a:rPr lang="en-US" sz="2200" i="1" dirty="0"/>
+              <a:t>deterministic switching rule</a:t>
+            </a:r>
+            <a:r>
+              <a:rPr lang="en-US" sz="2200" dirty="0"/>
+              <a:t>). SETAR (Tong 1978/1990), TAR, STAR: the AR regime in force at time t is determined by whether a lagged value of the series crosses a threshold (or smoothly transitions in case of STAR).</a:t>
             </a:r>
           </a:p>
           <a:p>
@@ -32535,8 +32603,24 @@
               <a:buChar char="•"/>
             </a:pPr>
             <a:r>
+              <a:rPr lang="en-US" sz="2200" dirty="0">
+                <a:solidFill>
+                  <a:schemeClr val="accent2"/>
+                </a:solidFill>
+              </a:rPr>
+              <a:t>Markov-switching</a:t>
+            </a:r>
+            <a:r>
               <a:rPr lang="en-US" sz="2200" dirty="0"/>
-              <a:t>Markov-switching (latent stochastic switching rule). Markov-Switching Autoregressive model (Hamilton, 1989): regime is an unobserved discrete state following a Markov chain. Used for business-cycle identification (expansion / recession) and, in finance, for volatility regimes.</a:t>
+              <a:t> (</a:t>
+            </a:r>
+            <a:r>
+              <a:rPr lang="en-US" sz="2200" i="1" dirty="0"/>
+              <a:t>latent stochastic switching rule</a:t>
+            </a:r>
+            <a:r>
+              <a:rPr lang="en-US" sz="2200" dirty="0"/>
+              <a:t>). Markov-Switching Autoregressive model (Hamilton, 1989): regime is an unobserved discrete state following a Markov chain. Used for business-cycle identification (expansion / recession) and, in finance, for volatility regimes.</a:t>
             </a:r>
           </a:p>
         </p:txBody>
@@ -32706,7 +32790,19 @@
             </a:pPr>
             <a:r>
               <a:rPr lang="en-US" sz="2000" dirty="0"/>
-              <a:t>Segmenting the time series in order both to model active regimes in the past and forecast future behavior is largely unexplored.</a:t>
+              <a:t>Segmenting the time series in order </a:t>
+            </a:r>
+            <a:r>
+              <a:rPr lang="en-US" sz="2000" b="1" dirty="0">
+                <a:solidFill>
+                  <a:schemeClr val="accent2"/>
+                </a:solidFill>
+              </a:rPr>
+              <a:t>both to model active regimes in the past and forecast future behavior</a:t>
+            </a:r>
+            <a:r>
+              <a:rPr lang="en-US" sz="2000" dirty="0"/>
+              <a:t> is largely unexplored.</a:t>
             </a:r>
           </a:p>
           <a:p>
@@ -32717,7 +32813,31 @@
             </a:pPr>
             <a:r>
               <a:rPr lang="en-US" sz="2000" dirty="0"/>
-              <a:t>Current changepoint detection methods are designed to model the time series in-sample; segmentation is chosen with no out-of-sample forecasting intent.</a:t>
+              <a:t>Current changepoint detection methods are designed to </a:t>
+            </a:r>
+            <a:r>
+              <a:rPr lang="en-US" sz="2000" dirty="0">
+                <a:solidFill>
+                  <a:schemeClr val="accent2"/>
+                </a:solidFill>
+              </a:rPr>
+              <a:t>model the time series in-sample</a:t>
+            </a:r>
+            <a:r>
+              <a:rPr lang="en-US" sz="2000" dirty="0"/>
+              <a:t>; segmentation is chosen with </a:t>
+            </a:r>
+            <a:r>
+              <a:rPr lang="en-US" sz="2000" dirty="0">
+                <a:solidFill>
+                  <a:schemeClr val="accent2"/>
+                </a:solidFill>
+              </a:rPr>
+              <a:t>no out-of-sample </a:t>
+            </a:r>
+            <a:r>
+              <a:rPr lang="en-US" sz="2000" dirty="0"/>
+              <a:t>forecasting intent.</a:t>
             </a:r>
           </a:p>
           <a:p>
@@ -32741,7 +32861,15 @@
             </a:pPr>
             <a:r>
               <a:rPr lang="en-US" sz="2000" dirty="0"/>
-              <a:t>SETAR: switches deterministically between a fixed, predefined set of regimes — cannot represent structural changes beyond that fixed parametric set.</a:t>
+              <a:t>SETAR: switches deterministically between a </a:t>
+            </a:r>
+            <a:r>
+              <a:rPr lang="en-US" sz="2000" i="1" dirty="0"/>
+              <a:t>fixed, predefined set of regimes </a:t>
+            </a:r>
+            <a:r>
+              <a:rPr lang="en-US" sz="2000" dirty="0"/>
+              <a:t>— cannot represent structural changes beyond that fixed parametric set.</a:t>
             </a:r>
           </a:p>
           <a:p>
@@ -32754,7 +32882,23 @@
             </a:pPr>
             <a:r>
               <a:rPr lang="en-US" sz="2000" dirty="0"/>
-              <a:t>Markov-switching: regime is latent and only known probabilistically at the forecast origin; multi-step forecasts average over regimes, diluting the regime-specific dynamics of interest for in-sample analysis. </a:t>
+              <a:t>Markov-switching: </a:t>
+            </a:r>
+            <a:r>
+              <a:rPr lang="en-US" sz="2000" i="1" dirty="0"/>
+              <a:t>regime is latent </a:t>
+            </a:r>
+            <a:r>
+              <a:rPr lang="en-US" sz="2000" dirty="0"/>
+              <a:t>and only known probabilistically at the forecast origin; multi-step forecasts average over regimes, </a:t>
+            </a:r>
+            <a:r>
+              <a:rPr lang="en-US" sz="2000" i="1" dirty="0"/>
+              <a:t>diluting the regime-specific dynamics</a:t>
+            </a:r>
+            <a:r>
+              <a:rPr lang="en-US" sz="2000" dirty="0"/>
+              <a:t> of interest for in-sample analysis. </a:t>
             </a:r>
           </a:p>
           <a:p>
@@ -32776,7 +32920,19 @@
             </a:pPr>
             <a:r>
               <a:rPr lang="en-US" sz="2000" dirty="0"/>
-              <a:t>We propose to identify time segments using the predictive accuracy of a forecasting model (AR, theta, MLP, … ) as a cost function, in place of the standard in-sample fit criteria (e.g. RSS/likelihood) used by existing segmentation methods.</a:t>
+              <a:t>We propose to </a:t>
+            </a:r>
+            <a:r>
+              <a:rPr lang="en-US" sz="2000" b="1" i="1" dirty="0">
+                <a:solidFill>
+                  <a:schemeClr val="accent2"/>
+                </a:solidFill>
+              </a:rPr>
+              <a:t>identify time segments using the predictive accuracy of a forecasting model </a:t>
+            </a:r>
+            <a:r>
+              <a:rPr lang="en-US" sz="2000" dirty="0"/>
+              <a:t>(AR, theta, MLP, … ) as a cost function, in place of the standard in-sample fit criteria (e.g. RSS/likelihood) used by existing segmentation methods.</a:t>
             </a:r>
           </a:p>
           <a:p>
@@ -32914,8 +33070,8 @@
           <a:chExt cx="0" cy="0"/>
         </a:xfrm>
       </p:grpSpPr>
-      <mc:AlternateContent xmlns:mc="http://schemas.openxmlformats.org/markup-compatibility/2006" xmlns:a14="http://schemas.microsoft.com/office/drawing/2010/main">
-        <mc:Choice Requires="a14">
+      <mc:AlternateContent xmlns:mc="http://schemas.openxmlformats.org/markup-compatibility/2006">
+        <mc:Choice xmlns:a14="http://schemas.microsoft.com/office/drawing/2010/main" Requires="a14">
           <p:sp>
             <p:nvSpPr>
               <p:cNvPr id="2" name="Content Placeholder 1">
@@ -32940,26 +33096,90 @@
               <a:lstStyle/>
               <a:p>
                 <a:r>
-                  <a:rPr lang="en-US" sz="2400"/>
-                  <a:t>We generate all feasible time segments (suitable length and other segment-level constraints).</a:t>
+                  <a:rPr lang="en-US" sz="2400" dirty="0"/>
+                  <a:t>We </a:t>
+                </a:r>
+                <a:r>
+                  <a:rPr lang="en-US" sz="2400" dirty="0">
+                    <a:solidFill>
+                      <a:schemeClr val="accent2"/>
+                    </a:solidFill>
+                  </a:rPr>
+                  <a:t>generate all feasible time segments</a:t>
+                </a:r>
+                <a:r>
+                  <a:rPr lang="en-US" sz="2400" dirty="0"/>
+                  <a:t> (suitable length and other segment-level constraints).</a:t>
                 </a:r>
               </a:p>
               <a:p>
                 <a:r>
                   <a:rPr lang="en-US" sz="2400" dirty="0"/>
-                  <a:t>We apply the forecasting model of interest to each segment.</a:t>
+                  <a:t>We </a:t>
+                </a:r>
+                <a:r>
+                  <a:rPr lang="en-US" sz="2400" dirty="0">
+                    <a:solidFill>
+                      <a:schemeClr val="accent2"/>
+                    </a:solidFill>
+                  </a:rPr>
+                  <a:t>apply the forecasting model </a:t>
+                </a:r>
+                <a:r>
+                  <a:rPr lang="en-US" sz="2400" dirty="0"/>
+                  <a:t>of interest to each segment.</a:t>
                 </a:r>
               </a:p>
               <a:p>
                 <a:r>
                   <a:rPr lang="en-US" sz="2400" dirty="0"/>
-                  <a:t>Each segment cost is the RMSE of the forecast on its following validation interval.</a:t>
+                  <a:t>Each segment </a:t>
+                </a:r>
+                <a:r>
+                  <a:rPr lang="en-US" sz="2400" dirty="0">
+                    <a:solidFill>
+                      <a:schemeClr val="accent2"/>
+                    </a:solidFill>
+                  </a:rPr>
+                  <a:t>cost</a:t>
+                </a:r>
+                <a:r>
+                  <a:rPr lang="en-US" sz="2400" dirty="0"/>
+                  <a:t> is the RMSE of the forecast </a:t>
+                </a:r>
+                <a:r>
+                  <a:rPr lang="en-US" sz="2400" i="1" dirty="0"/>
+                  <a:t>on its following validation interval</a:t>
+                </a:r>
+                <a:r>
+                  <a:rPr lang="en-US" sz="2400" dirty="0"/>
+                  <a:t>.</a:t>
                 </a:r>
               </a:p>
               <a:p>
                 <a:r>
                   <a:rPr lang="en-US" sz="2400" dirty="0"/>
-                  <a:t>We identify the subset of segments  that collectively partitions the whole input series of minimum average cost, solving – and possibly extending – the SPP-like formulation</a:t>
+                  <a:t>We identify the </a:t>
+                </a:r>
+                <a:r>
+                  <a:rPr lang="en-US" sz="2400" dirty="0">
+                    <a:solidFill>
+                      <a:schemeClr val="accent2"/>
+                    </a:solidFill>
+                  </a:rPr>
+                  <a:t>subset of segments  that collectively partitions </a:t>
+                </a:r>
+                <a:r>
+                  <a:rPr lang="en-US" sz="2400" dirty="0"/>
+                  <a:t>the whole input series of minimum average cost, solving – and possibly extending – the </a:t>
+                </a:r>
+                <a:r>
+                  <a:rPr lang="en-US" sz="2400" b="1" dirty="0">
+                    <a:solidFill>
+                      <a:schemeClr val="accent2"/>
+                    </a:solidFill>
+                  </a:rPr>
+                  <a:t>SPP-like formulation</a:t>
                 </a:r>
               </a:p>
               <a:p>
@@ -33413,7 +33633,7 @@
             </p:txBody>
           </p:sp>
         </mc:Choice>
-        <mc:Fallback xmlns="">
+        <mc:Fallback>
           <p:sp>
             <p:nvSpPr>
               <p:cNvPr id="2" name="Content Placeholder 1">
@@ -33583,8 +33803,8 @@
           <a:chExt cx="0" cy="0"/>
         </a:xfrm>
       </p:grpSpPr>
-      <mc:AlternateContent xmlns:mc="http://schemas.openxmlformats.org/markup-compatibility/2006" xmlns:a14="http://schemas.microsoft.com/office/drawing/2010/main">
-        <mc:Choice Requires="a14">
+      <mc:AlternateContent xmlns:mc="http://schemas.openxmlformats.org/markup-compatibility/2006">
+        <mc:Choice xmlns:a14="http://schemas.microsoft.com/office/drawing/2010/main" Requires="a14">
           <p:sp>
             <p:nvSpPr>
               <p:cNvPr id="2" name="Content Placeholder 1">
@@ -33601,10 +33821,15 @@
                 <p:ph idx="1"/>
               </p:nvPr>
             </p:nvSpPr>
-            <p:spPr/>
+            <p:spPr>
+              <a:xfrm>
+                <a:off x="298907" y="1112372"/>
+                <a:ext cx="8546175" cy="5646806"/>
+              </a:xfrm>
+            </p:spPr>
             <p:txBody>
               <a:bodyPr>
-                <a:normAutofit fontScale="92500" lnSpcReduction="10000"/>
+                <a:normAutofit fontScale="92500"/>
               </a:bodyPr>
               <a:lstStyle/>
               <a:p>
@@ -33626,7 +33851,15 @@
                 </a:r>
                 <a:r>
                   <a:rPr lang="it-IT" dirty="0"/>
-                  <a:t> non linear</a:t>
+                  <a:t> </a:t>
+                </a:r>
+                <a:r>
+                  <a:rPr lang="it-IT" dirty="0">
+                    <a:solidFill>
+                      <a:schemeClr val="accent2"/>
+                    </a:solidFill>
+                  </a:rPr>
+                  <a:t>non linear</a:t>
                 </a:r>
               </a:p>
               <a:p>
@@ -34331,7 +34564,15 @@
                 </a14:m>
                 <a:r>
                   <a:rPr lang="en-US" dirty="0"/>
-                  <a:t> is convex and non-increasing in </a:t>
+                  <a:t> is </a:t>
+                </a:r>
+                <a:r>
+                  <a:rPr lang="en-US" i="1" dirty="0"/>
+                  <a:t>convex and non-increasing </a:t>
+                </a:r>
+                <a:r>
+                  <a:rPr lang="en-US" dirty="0"/>
+                  <a:t>in </a:t>
                 </a:r>
                 <a14:m>
                   <m:oMath xmlns:m="http://schemas.openxmlformats.org/officeDocument/2006/math">
@@ -34351,7 +34592,7 @@
               <a:p>
                 <a:pPr>
                   <a:spcBef>
-                    <a:spcPts val="600"/>
+                    <a:spcPts val="1200"/>
                   </a:spcBef>
                 </a:pPr>
                 <a:r>
@@ -34392,7 +34633,7 @@
               <a:p>
                 <a:pPr>
                   <a:spcBef>
-                    <a:spcPts val="600"/>
+                    <a:spcPts val="1200"/>
                   </a:spcBef>
                 </a:pPr>
                 <a:r>
@@ -34473,7 +34714,7 @@
               <a:p>
                 <a:pPr>
                   <a:spcBef>
-                    <a:spcPts val="600"/>
+                    <a:spcPts val="1200"/>
                   </a:spcBef>
                 </a:pPr>
                 <a:r>
@@ -34497,7 +34738,11 @@
                   <a:t> </a:t>
                 </a:r>
                 <a:r>
-                  <a:rPr lang="it-IT" b="1" i="1" dirty="0" err="1"/>
+                  <a:rPr lang="it-IT" b="1" i="1" dirty="0" err="1">
+                    <a:solidFill>
+                      <a:schemeClr val="accent2"/>
+                    </a:solidFill>
+                  </a:rPr>
                   <a:t>superlinear</a:t>
                 </a:r>
                 <a:r>
@@ -34514,6 +34759,11 @@
                 </a:r>
               </a:p>
               <a:p>
+                <a:pPr>
+                  <a:spcBef>
+                    <a:spcPts val="1200"/>
+                  </a:spcBef>
+                </a:pPr>
                 <a:r>
                   <a:rPr lang="en-US" sz="1700" dirty="0" err="1"/>
                   <a:t>Dinkelbach</a:t>
@@ -34543,7 +34793,7 @@
             </p:txBody>
           </p:sp>
         </mc:Choice>
-        <mc:Fallback xmlns="">
+        <mc:Fallback>
           <p:sp>
             <p:nvSpPr>
               <p:cNvPr id="2" name="Content Placeholder 1">
@@ -34561,10 +34811,14 @@
               </p:nvPr>
             </p:nvSpPr>
             <p:spPr>
+              <a:xfrm>
+                <a:off x="298907" y="1112372"/>
+                <a:ext cx="8546175" cy="5646806"/>
+              </a:xfrm>
               <a:blipFill>
                 <a:blip r:embed="rId2"/>
                 <a:stretch>
-                  <a:fillRect l="-1284" t="-1856"/>
+                  <a:fillRect l="-1284" t="-863"/>
                 </a:stretch>
               </a:blipFill>
             </p:spPr>
@@ -34841,7 +35095,19 @@
             </a:pPr>
             <a:r>
               <a:rPr lang="en-US" sz="2600" dirty="0"/>
-              <a:t>Forecasting models are autoregressive AR(1), ETS Holt-Winters, theta, random forest.</a:t>
+              <a:t>Forecasting models are autoregressive </a:t>
+            </a:r>
+            <a:r>
+              <a:rPr lang="en-US" sz="2600" dirty="0">
+                <a:solidFill>
+                  <a:schemeClr val="accent2"/>
+                </a:solidFill>
+              </a:rPr>
+              <a:t>AR(1), ETS Holt-Winters, theta, random forest</a:t>
+            </a:r>
+            <a:r>
+              <a:rPr lang="en-US" sz="2600" dirty="0"/>
+              <a:t>.</a:t>
             </a:r>
           </a:p>
           <a:p>
@@ -35047,13 +35313,13 @@
             <p:ph idx="1"/>
             <p:extLst>
               <p:ext uri="{D42A27DB-BD31-4B8C-83A1-F6EECF244321}">
-                <p14:modId xmlns:p14="http://schemas.microsoft.com/office/powerpoint/2010/main" val="1812822027"/>
+                <p14:modId xmlns:p14="http://schemas.microsoft.com/office/powerpoint/2010/main" val="3853330212"/>
               </p:ext>
             </p:extLst>
           </p:nvPr>
         </p:nvGraphicFramePr>
         <p:xfrm>
-          <a:off x="276301" y="1303619"/>
+          <a:off x="276301" y="1180531"/>
           <a:ext cx="8800258" cy="4261925"/>
         </p:xfrm>
         <a:graphic>
@@ -45106,10 +45372,9 @@
               <a:defRPr/>
             </a:pPr>
             <a:r>
-              <a:rPr lang="it-IT"/>
+              <a:rPr lang="it-IT" dirty="0"/>
               <a:t>Vittorio Maniezzo - University of Bologna</a:t>
             </a:r>
-            <a:endParaRPr lang="it-IT" dirty="0"/>
           </a:p>
         </p:txBody>
       </p:sp>
@@ -45145,6 +45410,44 @@
               <a:t>8</a:t>
             </a:fld>
             <a:endParaRPr lang="it-IT" dirty="0"/>
+          </a:p>
+        </p:txBody>
+      </p:sp>
+      <p:sp>
+        <p:nvSpPr>
+          <p:cNvPr id="2" name="TextBox 1">
+            <a:extLst>
+              <a:ext uri="{FF2B5EF4-FFF2-40B4-BE49-F238E27FC236}">
+                <a16:creationId xmlns:a16="http://schemas.microsoft.com/office/drawing/2014/main" id="{669C3923-2AE2-AB46-185B-F8481B7DEC34}"/>
+              </a:ext>
+            </a:extLst>
+          </p:cNvPr>
+          <p:cNvSpPr txBox="1"/>
+          <p:nvPr/>
+        </p:nvSpPr>
+        <p:spPr>
+          <a:xfrm>
+            <a:off x="138150" y="5657254"/>
+            <a:ext cx="8867700" cy="830997"/>
+          </a:xfrm>
+          <a:prstGeom prst="rect">
+            <a:avLst/>
+          </a:prstGeom>
+          <a:noFill/>
+          <a:ln>
+            <a:noFill/>
+          </a:ln>
+        </p:spPr>
+        <p:txBody>
+          <a:bodyPr wrap="square" rtlCol="0" anchor="t" anchorCtr="0">
+            <a:spAutoFit/>
+          </a:bodyPr>
+          <a:lstStyle/>
+          <a:p>
+            <a:r>
+              <a:rPr lang="en-US" sz="1600" dirty="0"/>
+              <a:t>Segmentation gains are model‑dependent. One can either select the model that maximizes average error reduction (with low variance), or — for a given model — use the empirical distribution of gains to anticipate the benefit of segmentation.</a:t>
+            </a:r>
           </a:p>
         </p:txBody>
       </p:sp>

--- a/doc/IOCFC26/forecastSegmentation.pptx
+++ b/doc/IOCFC26/forecastSegmentation.pptx
@@ -1,9 +1,12 @@
 
 <file path=ppt/presentation.xml><?xml version="1.0" encoding="utf-8"?>
-<p:presentation xmlns:a="http://schemas.openxmlformats.org/drawingml/2006/main" xmlns:r="http://schemas.openxmlformats.org/officeDocument/2006/relationships" xmlns:p="http://schemas.openxmlformats.org/presentationml/2006/main" saveSubsetFonts="1">
+<p:presentation xmlns:a="http://schemas.openxmlformats.org/drawingml/2006/main" xmlns:r="http://schemas.openxmlformats.org/officeDocument/2006/relationships" xmlns:p="http://schemas.openxmlformats.org/presentationml/2006/main" showSpecialPlsOnTitleSld="0" saveSubsetFonts="1">
   <p:sldMasterIdLst>
     <p:sldMasterId id="2147483696" r:id="rId1"/>
   </p:sldMasterIdLst>
+  <p:notesMasterIdLst>
+    <p:notesMasterId r:id="rId16"/>
+  </p:notesMasterIdLst>
   <p:sldIdLst>
     <p:sldId id="256" r:id="rId2"/>
     <p:sldId id="269" r:id="rId3"/>
@@ -134,6 +137,356 @@
     </p:ext>
   </p:extLst>
 </p:presentation>
+</file>
+
+<file path=ppt/notesMasters/notesMaster1.xml><?xml version="1.0" encoding="utf-8"?>
+<p:notesMaster xmlns:a="http://schemas.openxmlformats.org/drawingml/2006/main" xmlns:r="http://schemas.openxmlformats.org/officeDocument/2006/relationships" xmlns:p="http://schemas.openxmlformats.org/presentationml/2006/main">
+  <p:cSld>
+    <p:bg>
+      <p:bgRef idx="1001">
+        <a:schemeClr val="bg1"/>
+      </p:bgRef>
+    </p:bg>
+    <p:spTree>
+      <p:nvGrpSpPr>
+        <p:cNvPr id="1" name=""/>
+        <p:cNvGrpSpPr/>
+        <p:nvPr/>
+      </p:nvGrpSpPr>
+      <p:grpSpPr>
+        <a:xfrm>
+          <a:off x="0" y="0"/>
+          <a:ext cx="0" cy="0"/>
+          <a:chOff x="0" y="0"/>
+          <a:chExt cx="0" cy="0"/>
+        </a:xfrm>
+      </p:grpSpPr>
+      <p:sp>
+        <p:nvSpPr>
+          <p:cNvPr id="2" name="Header Placeholder 1"/>
+          <p:cNvSpPr>
+            <a:spLocks noGrp="1"/>
+          </p:cNvSpPr>
+          <p:nvPr>
+            <p:ph type="hdr" sz="quarter"/>
+          </p:nvPr>
+        </p:nvSpPr>
+        <p:spPr>
+          <a:xfrm>
+            <a:off x="0" y="0"/>
+            <a:ext cx="3076575" cy="512763"/>
+          </a:xfrm>
+          <a:prstGeom prst="rect">
+            <a:avLst/>
+          </a:prstGeom>
+        </p:spPr>
+        <p:txBody>
+          <a:bodyPr vert="horz" lIns="91440" tIns="45720" rIns="91440" bIns="45720" rtlCol="0"/>
+          <a:lstStyle>
+            <a:lvl1pPr algn="l">
+              <a:defRPr sz="1200"/>
+            </a:lvl1pPr>
+          </a:lstStyle>
+          <a:p>
+            <a:endParaRPr lang="en-US"/>
+          </a:p>
+        </p:txBody>
+      </p:sp>
+      <p:sp>
+        <p:nvSpPr>
+          <p:cNvPr id="3" name="Date Placeholder 2"/>
+          <p:cNvSpPr>
+            <a:spLocks noGrp="1"/>
+          </p:cNvSpPr>
+          <p:nvPr>
+            <p:ph type="dt" idx="1"/>
+          </p:nvPr>
+        </p:nvSpPr>
+        <p:spPr>
+          <a:xfrm>
+            <a:off x="4021138" y="0"/>
+            <a:ext cx="3076575" cy="512763"/>
+          </a:xfrm>
+          <a:prstGeom prst="rect">
+            <a:avLst/>
+          </a:prstGeom>
+        </p:spPr>
+        <p:txBody>
+          <a:bodyPr vert="horz" lIns="91440" tIns="45720" rIns="91440" bIns="45720" rtlCol="0"/>
+          <a:lstStyle>
+            <a:lvl1pPr algn="r">
+              <a:defRPr sz="1200"/>
+            </a:lvl1pPr>
+          </a:lstStyle>
+          <a:p>
+            <a:fld id="{B4875DD0-DE0A-4E46-A4B1-4A7CC1FFB8A4}" type="datetimeFigureOut">
+              <a:rPr lang="en-US" smtClean="0"/>
+              <a:t>9/12/2026</a:t>
+            </a:fld>
+            <a:endParaRPr lang="en-US"/>
+          </a:p>
+        </p:txBody>
+      </p:sp>
+      <p:sp>
+        <p:nvSpPr>
+          <p:cNvPr id="4" name="Slide Image Placeholder 3"/>
+          <p:cNvSpPr>
+            <a:spLocks noGrp="1" noRot="1" noChangeAspect="1"/>
+          </p:cNvSpPr>
+          <p:nvPr>
+            <p:ph type="sldImg" idx="2"/>
+          </p:nvPr>
+        </p:nvSpPr>
+        <p:spPr>
+          <a:xfrm>
+            <a:off x="1246188" y="1279525"/>
+            <a:ext cx="4606925" cy="3454400"/>
+          </a:xfrm>
+          <a:prstGeom prst="rect">
+            <a:avLst/>
+          </a:prstGeom>
+          <a:noFill/>
+          <a:ln w="12700">
+            <a:solidFill>
+              <a:prstClr val="black"/>
+            </a:solidFill>
+          </a:ln>
+        </p:spPr>
+        <p:txBody>
+          <a:bodyPr vert="horz" lIns="91440" tIns="45720" rIns="91440" bIns="45720" rtlCol="0" anchor="ctr"/>
+          <a:lstStyle/>
+          <a:p>
+            <a:endParaRPr lang="en-US"/>
+          </a:p>
+        </p:txBody>
+      </p:sp>
+      <p:sp>
+        <p:nvSpPr>
+          <p:cNvPr id="5" name="Notes Placeholder 4"/>
+          <p:cNvSpPr>
+            <a:spLocks noGrp="1"/>
+          </p:cNvSpPr>
+          <p:nvPr>
+            <p:ph type="body" sz="quarter" idx="3"/>
+          </p:nvPr>
+        </p:nvSpPr>
+        <p:spPr>
+          <a:xfrm>
+            <a:off x="709613" y="4926013"/>
+            <a:ext cx="5680075" cy="4029075"/>
+          </a:xfrm>
+          <a:prstGeom prst="rect">
+            <a:avLst/>
+          </a:prstGeom>
+        </p:spPr>
+        <p:txBody>
+          <a:bodyPr vert="horz" lIns="91440" tIns="45720" rIns="91440" bIns="45720" rtlCol="0"/>
+          <a:lstStyle/>
+          <a:p>
+            <a:pPr lvl="0"/>
+            <a:r>
+              <a:rPr lang="en-GB"/>
+              <a:t>Click to edit Master text styles</a:t>
+            </a:r>
+          </a:p>
+          <a:p>
+            <a:pPr lvl="1"/>
+            <a:r>
+              <a:rPr lang="en-GB"/>
+              <a:t>Second level</a:t>
+            </a:r>
+          </a:p>
+          <a:p>
+            <a:pPr lvl="2"/>
+            <a:r>
+              <a:rPr lang="en-GB"/>
+              <a:t>Third level</a:t>
+            </a:r>
+          </a:p>
+          <a:p>
+            <a:pPr lvl="3"/>
+            <a:r>
+              <a:rPr lang="en-GB"/>
+              <a:t>Fourth level</a:t>
+            </a:r>
+          </a:p>
+          <a:p>
+            <a:pPr lvl="4"/>
+            <a:r>
+              <a:rPr lang="en-GB"/>
+              <a:t>Fifth level</a:t>
+            </a:r>
+            <a:endParaRPr lang="en-US"/>
+          </a:p>
+        </p:txBody>
+      </p:sp>
+      <p:sp>
+        <p:nvSpPr>
+          <p:cNvPr id="6" name="Footer Placeholder 5"/>
+          <p:cNvSpPr>
+            <a:spLocks noGrp="1"/>
+          </p:cNvSpPr>
+          <p:nvPr>
+            <p:ph type="ftr" sz="quarter" idx="4"/>
+          </p:nvPr>
+        </p:nvSpPr>
+        <p:spPr>
+          <a:xfrm>
+            <a:off x="0" y="9721850"/>
+            <a:ext cx="3076575" cy="512763"/>
+          </a:xfrm>
+          <a:prstGeom prst="rect">
+            <a:avLst/>
+          </a:prstGeom>
+        </p:spPr>
+        <p:txBody>
+          <a:bodyPr vert="horz" lIns="91440" tIns="45720" rIns="91440" bIns="45720" rtlCol="0" anchor="b"/>
+          <a:lstStyle>
+            <a:lvl1pPr algn="l">
+              <a:defRPr sz="1200"/>
+            </a:lvl1pPr>
+          </a:lstStyle>
+          <a:p>
+            <a:endParaRPr lang="en-US"/>
+          </a:p>
+        </p:txBody>
+      </p:sp>
+      <p:sp>
+        <p:nvSpPr>
+          <p:cNvPr id="7" name="Slide Number Placeholder 6"/>
+          <p:cNvSpPr>
+            <a:spLocks noGrp="1"/>
+          </p:cNvSpPr>
+          <p:nvPr>
+            <p:ph type="sldNum" sz="quarter" idx="5"/>
+          </p:nvPr>
+        </p:nvSpPr>
+        <p:spPr>
+          <a:xfrm>
+            <a:off x="4021138" y="9721850"/>
+            <a:ext cx="3076575" cy="512763"/>
+          </a:xfrm>
+          <a:prstGeom prst="rect">
+            <a:avLst/>
+          </a:prstGeom>
+        </p:spPr>
+        <p:txBody>
+          <a:bodyPr vert="horz" lIns="91440" tIns="45720" rIns="91440" bIns="45720" rtlCol="0" anchor="b"/>
+          <a:lstStyle>
+            <a:lvl1pPr algn="r">
+              <a:defRPr sz="1200"/>
+            </a:lvl1pPr>
+          </a:lstStyle>
+          <a:p>
+            <a:fld id="{881E0547-E36C-4EA5-9D09-D5628C7AED5B}" type="slidenum">
+              <a:rPr lang="en-US" smtClean="0"/>
+              <a:t>‹#›</a:t>
+            </a:fld>
+            <a:endParaRPr lang="en-US"/>
+          </a:p>
+        </p:txBody>
+      </p:sp>
+    </p:spTree>
+    <p:extLst>
+      <p:ext uri="{BB962C8B-B14F-4D97-AF65-F5344CB8AC3E}">
+        <p14:creationId xmlns:p14="http://schemas.microsoft.com/office/powerpoint/2010/main" val="2595138412"/>
+      </p:ext>
+    </p:extLst>
+  </p:cSld>
+  <p:clrMap bg1="lt1" tx1="dk1" bg2="lt2" tx2="dk2" accent1="accent1" accent2="accent2" accent3="accent3" accent4="accent4" accent5="accent5" accent6="accent6" hlink="hlink" folHlink="folHlink"/>
+  <p:notesStyle>
+    <a:lvl1pPr marL="0" algn="l" defTabSz="914400" rtl="0" eaLnBrk="1" latinLnBrk="0" hangingPunct="1">
+      <a:defRPr sz="1200" kern="1200">
+        <a:solidFill>
+          <a:schemeClr val="tx1"/>
+        </a:solidFill>
+        <a:latin typeface="+mn-lt"/>
+        <a:ea typeface="+mn-ea"/>
+        <a:cs typeface="+mn-cs"/>
+      </a:defRPr>
+    </a:lvl1pPr>
+    <a:lvl2pPr marL="457200" algn="l" defTabSz="914400" rtl="0" eaLnBrk="1" latinLnBrk="0" hangingPunct="1">
+      <a:defRPr sz="1200" kern="1200">
+        <a:solidFill>
+          <a:schemeClr val="tx1"/>
+        </a:solidFill>
+        <a:latin typeface="+mn-lt"/>
+        <a:ea typeface="+mn-ea"/>
+        <a:cs typeface="+mn-cs"/>
+      </a:defRPr>
+    </a:lvl2pPr>
+    <a:lvl3pPr marL="914400" algn="l" defTabSz="914400" rtl="0" eaLnBrk="1" latinLnBrk="0" hangingPunct="1">
+      <a:defRPr sz="1200" kern="1200">
+        <a:solidFill>
+          <a:schemeClr val="tx1"/>
+        </a:solidFill>
+        <a:latin typeface="+mn-lt"/>
+        <a:ea typeface="+mn-ea"/>
+        <a:cs typeface="+mn-cs"/>
+      </a:defRPr>
+    </a:lvl3pPr>
+    <a:lvl4pPr marL="1371600" algn="l" defTabSz="914400" rtl="0" eaLnBrk="1" latinLnBrk="0" hangingPunct="1">
+      <a:defRPr sz="1200" kern="1200">
+        <a:solidFill>
+          <a:schemeClr val="tx1"/>
+        </a:solidFill>
+        <a:latin typeface="+mn-lt"/>
+        <a:ea typeface="+mn-ea"/>
+        <a:cs typeface="+mn-cs"/>
+      </a:defRPr>
+    </a:lvl4pPr>
+    <a:lvl5pPr marL="1828800" algn="l" defTabSz="914400" rtl="0" eaLnBrk="1" latinLnBrk="0" hangingPunct="1">
+      <a:defRPr sz="1200" kern="1200">
+        <a:solidFill>
+          <a:schemeClr val="tx1"/>
+        </a:solidFill>
+        <a:latin typeface="+mn-lt"/>
+        <a:ea typeface="+mn-ea"/>
+        <a:cs typeface="+mn-cs"/>
+      </a:defRPr>
+    </a:lvl5pPr>
+    <a:lvl6pPr marL="2286000" algn="l" defTabSz="914400" rtl="0" eaLnBrk="1" latinLnBrk="0" hangingPunct="1">
+      <a:defRPr sz="1200" kern="1200">
+        <a:solidFill>
+          <a:schemeClr val="tx1"/>
+        </a:solidFill>
+        <a:latin typeface="+mn-lt"/>
+        <a:ea typeface="+mn-ea"/>
+        <a:cs typeface="+mn-cs"/>
+      </a:defRPr>
+    </a:lvl6pPr>
+    <a:lvl7pPr marL="2743200" algn="l" defTabSz="914400" rtl="0" eaLnBrk="1" latinLnBrk="0" hangingPunct="1">
+      <a:defRPr sz="1200" kern="1200">
+        <a:solidFill>
+          <a:schemeClr val="tx1"/>
+        </a:solidFill>
+        <a:latin typeface="+mn-lt"/>
+        <a:ea typeface="+mn-ea"/>
+        <a:cs typeface="+mn-cs"/>
+      </a:defRPr>
+    </a:lvl7pPr>
+    <a:lvl8pPr marL="3200400" algn="l" defTabSz="914400" rtl="0" eaLnBrk="1" latinLnBrk="0" hangingPunct="1">
+      <a:defRPr sz="1200" kern="1200">
+        <a:solidFill>
+          <a:schemeClr val="tx1"/>
+        </a:solidFill>
+        <a:latin typeface="+mn-lt"/>
+        <a:ea typeface="+mn-ea"/>
+        <a:cs typeface="+mn-cs"/>
+      </a:defRPr>
+    </a:lvl8pPr>
+    <a:lvl9pPr marL="3657600" algn="l" defTabSz="914400" rtl="0" eaLnBrk="1" latinLnBrk="0" hangingPunct="1">
+      <a:defRPr sz="1200" kern="1200">
+        <a:solidFill>
+          <a:schemeClr val="tx1"/>
+        </a:solidFill>
+        <a:latin typeface="+mn-lt"/>
+        <a:ea typeface="+mn-ea"/>
+        <a:cs typeface="+mn-cs"/>
+      </a:defRPr>
+    </a:lvl9pPr>
+  </p:notesStyle>
+</p:notesMaster>
 </file>
 
 <file path=ppt/slideLayouts/slideLayout1.xml><?xml version="1.0" encoding="utf-8"?>
@@ -326,7 +679,6 @@
   <p:clrMapOvr>
     <a:masterClrMapping/>
   </p:clrMapOvr>
-  <p:hf hdr="0" dt="0"/>
 </p:sldLayout>
 </file>
 
@@ -9256,12 +9608,15 @@
         </p:nvSpPr>
         <p:spPr>
           <a:xfrm>
-            <a:off x="29185" y="6580584"/>
-            <a:ext cx="3102649" cy="304800"/>
+            <a:off x="-49196" y="6632838"/>
+            <a:ext cx="4542815" cy="304800"/>
           </a:xfrm>
           <a:prstGeom prst="rect">
             <a:avLst/>
           </a:prstGeom>
+          <a:ln>
+            <a:noFill/>
+          </a:ln>
         </p:spPr>
         <p:txBody>
           <a:bodyPr vert="horz" lIns="91440" tIns="45720" rIns="91440" bIns="45720" rtlCol="0" anchor="ctr"/>
@@ -9269,7 +9624,9 @@
             <a:lvl1pPr algn="l">
               <a:defRPr sz="1200" b="1" i="0">
                 <a:solidFill>
-                  <a:schemeClr val="tx1"/>
+                  <a:schemeClr val="bg1">
+                    <a:lumMod val="95000"/>
+                  </a:schemeClr>
                 </a:solidFill>
                 <a:latin typeface="ManiezzoSlides" pitchFamily="2" charset="0"/>
                 <a:ea typeface="Microsoft YaHei" panose="020B0503020204020204" pitchFamily="34" charset="-122"/>
@@ -9281,10 +9638,17 @@
               <a:defRPr/>
             </a:pPr>
             <a:r>
-              <a:rPr lang="it-IT"/>
-              <a:t>Vittorio Maniezzo - University of Bologna</a:t>
+              <a:rPr lang="it-IT" dirty="0"/>
+              <a:t>© 2026 Vittorio Maniezzo – </a:t>
             </a:r>
-            <a:endParaRPr lang="it-IT" dirty="0"/>
+            <a:r>
+              <a:rPr lang="it-IT" dirty="0" err="1"/>
+              <a:t>Licensed</a:t>
+            </a:r>
+            <a:r>
+              <a:rPr lang="it-IT" dirty="0"/>
+              <a:t> under CC BY-NC-ND 4.0</a:t>
+            </a:r>
           </a:p>
         </p:txBody>
       </p:sp>
@@ -9349,7 +9713,6 @@
   <p:clrMapOvr>
     <a:masterClrMapping/>
   </p:clrMapOvr>
-  <p:hf hdr="0" dt="0"/>
 </p:sldLayout>
 </file>
 
@@ -18250,7 +18613,7 @@
             </a:pPr>
             <a:r>
               <a:rPr lang="it-IT"/>
-              <a:t>Vittorio Maniezzo - University of Bologna</a:t>
+              <a:t>© 2026 Vittorio Maniezzo – Licensed under CC BY-NC-ND 4.0</a:t>
             </a:r>
             <a:endParaRPr lang="it-IT" dirty="0"/>
           </a:p>
@@ -18266,7 +18629,6 @@
   <p:clrMapOvr>
     <a:masterClrMapping/>
   </p:clrMapOvr>
-  <p:hf hdr="0" dt="0"/>
 </p:sldLayout>
 </file>
 
@@ -18360,7 +18722,7 @@
             </a:pPr>
             <a:r>
               <a:rPr lang="it-IT"/>
-              <a:t>Vittorio Maniezzo - University of Bologna</a:t>
+              <a:t>© 2026 Vittorio Maniezzo – Licensed under CC BY-NC-ND 4.0</a:t>
             </a:r>
             <a:endParaRPr lang="it-IT" dirty="0"/>
           </a:p>
@@ -18376,7 +18738,6 @@
   <p:clrMapOvr>
     <a:masterClrMapping/>
   </p:clrMapOvr>
-  <p:hf hdr="0" dt="0"/>
 </p:sldLayout>
 </file>
 
@@ -18515,8 +18876,8 @@
         </p:nvSpPr>
         <p:spPr>
           <a:xfrm>
-            <a:off x="107504" y="6597352"/>
-            <a:ext cx="3096344" cy="260648"/>
+            <a:off x="-40548" y="6701860"/>
+            <a:ext cx="4351285" cy="143082"/>
           </a:xfrm>
         </p:spPr>
         <p:txBody>
@@ -18532,15 +18893,15 @@
             </a:pPr>
             <a:r>
               <a:rPr lang="it-IT" dirty="0"/>
-              <a:t>Vittorio Maniezzo - </a:t>
+              <a:t>© 2026 Vittorio Maniezzo – </a:t>
             </a:r>
             <a:r>
               <a:rPr lang="it-IT" dirty="0" err="1"/>
-              <a:t>University</a:t>
+              <a:t>Licensed</a:t>
             </a:r>
             <a:r>
               <a:rPr lang="it-IT" dirty="0"/>
-              <a:t> of Bologna</a:t>
+              <a:t> under CC BY-NC-ND 4.0</a:t>
             </a:r>
           </a:p>
         </p:txBody>
@@ -21326,7 +21687,7 @@
             </a:pPr>
             <a:r>
               <a:rPr lang="it-IT"/>
-              <a:t>Vittorio Maniezzo - University of Bologna</a:t>
+              <a:t>© 2026 Vittorio Maniezzo – Licensed under CC BY-NC-ND 4.0</a:t>
             </a:r>
             <a:endParaRPr lang="it-IT" dirty="0"/>
           </a:p>
@@ -21487,7 +21848,7 @@
     <p:sldLayoutId id="2147483700" r:id="rId4"/>
     <p:sldLayoutId id="2147483701" r:id="rId5"/>
   </p:sldLayoutIdLst>
-  <p:hf hdr="0" dt="0"/>
+  <p:hf sldNum="0" hdr="0" dt="0"/>
   <p:txStyles>
     <p:titleStyle>
       <a:lvl1pPr algn="l" defTabSz="914400" rtl="0" eaLnBrk="1" latinLnBrk="0" hangingPunct="1">
@@ -21861,7 +22222,7 @@
         </p:nvSpPr>
         <p:spPr>
           <a:xfrm>
-            <a:off x="22080" y="5655523"/>
+            <a:off x="22080" y="5444510"/>
             <a:ext cx="3322029" cy="1202477"/>
           </a:xfrm>
         </p:spPr>
@@ -31149,7 +31510,7 @@
         </p:nvSpPr>
         <p:spPr>
           <a:xfrm>
-            <a:off x="6125209" y="5655523"/>
+            <a:off x="6125209" y="5444510"/>
             <a:ext cx="3004050" cy="1202477"/>
           </a:xfrm>
           <a:prstGeom prst="rect">
@@ -31395,6 +31756,49 @@
           </a:p>
         </p:txBody>
       </p:sp>
+      <p:sp>
+        <p:nvSpPr>
+          <p:cNvPr id="80" name="TextBox 79">
+            <a:extLst>
+              <a:ext uri="{FF2B5EF4-FFF2-40B4-BE49-F238E27FC236}">
+                <a16:creationId xmlns:a16="http://schemas.microsoft.com/office/drawing/2014/main" id="{DC8E4B4C-E884-F97A-0CD4-A991C2674B49}"/>
+              </a:ext>
+            </a:extLst>
+          </p:cNvPr>
+          <p:cNvSpPr txBox="1"/>
+          <p:nvPr/>
+        </p:nvSpPr>
+        <p:spPr>
+          <a:xfrm>
+            <a:off x="4844560" y="6635263"/>
+            <a:ext cx="4334611" cy="249113"/>
+          </a:xfrm>
+          <a:prstGeom prst="rect">
+            <a:avLst/>
+          </a:prstGeom>
+          <a:noFill/>
+          <a:ln>
+            <a:noFill/>
+          </a:ln>
+        </p:spPr>
+        <p:txBody>
+          <a:bodyPr wrap="none" rtlCol="0" anchor="t" anchorCtr="0">
+            <a:noAutofit/>
+          </a:bodyPr>
+          <a:lstStyle/>
+          <a:p>
+            <a:r>
+              <a:rPr lang="en-US" sz="1200" dirty="0">
+                <a:solidFill>
+                  <a:srgbClr val="7B6CA4"/>
+                </a:solidFill>
+                <a:latin typeface="ManiezzoSlides" pitchFamily="2" charset="0"/>
+              </a:rPr>
+              <a:t>© 2026 Vittorio Maniezzo – Licensed under CC BY-NC-ND 4.0</a:t>
+            </a:r>
+          </a:p>
+        </p:txBody>
+      </p:sp>
     </p:spTree>
     <p:extLst>
       <p:ext uri="{BB962C8B-B14F-4D97-AF65-F5344CB8AC3E}">
@@ -31508,43 +31912,8 @@
             </a:pPr>
             <a:r>
               <a:rPr lang="it-IT"/>
-              <a:t>Vittorio Maniezzo - University of Bologna</a:t>
+              <a:t>© 2026 Vittorio Maniezzo – Licensed under CC BY-NC-ND 4.0</a:t>
             </a:r>
-            <a:endParaRPr lang="it-IT" dirty="0"/>
-          </a:p>
-        </p:txBody>
-      </p:sp>
-      <p:sp>
-        <p:nvSpPr>
-          <p:cNvPr id="5" name="Slide Number Placeholder 4">
-            <a:extLst>
-              <a:ext uri="{FF2B5EF4-FFF2-40B4-BE49-F238E27FC236}">
-                <a16:creationId xmlns:a16="http://schemas.microsoft.com/office/drawing/2014/main" id="{67AD0263-38D8-4A89-B951-7E053882A45B}"/>
-              </a:ext>
-            </a:extLst>
-          </p:cNvPr>
-          <p:cNvSpPr>
-            <a:spLocks noGrp="1"/>
-          </p:cNvSpPr>
-          <p:nvPr>
-            <p:ph type="sldNum" sz="quarter" idx="4"/>
-          </p:nvPr>
-        </p:nvSpPr>
-        <p:spPr/>
-        <p:txBody>
-          <a:bodyPr/>
-          <a:lstStyle/>
-          <a:p>
-            <a:pPr>
-              <a:defRPr/>
-            </a:pPr>
-            <a:fld id="{476DEB1C-3253-4C07-8F02-456B7B2AD41D}" type="slidenum">
-              <a:rPr lang="it-IT" smtClean="0"/>
-              <a:pPr>
-                <a:defRPr/>
-              </a:pPr>
-              <a:t>10</a:t>
-            </a:fld>
             <a:endParaRPr lang="it-IT" dirty="0"/>
           </a:p>
         </p:txBody>
@@ -31662,43 +32031,8 @@
             </a:pPr>
             <a:r>
               <a:rPr lang="it-IT"/>
-              <a:t>Vittorio Maniezzo - University of Bologna</a:t>
+              <a:t>© 2026 Vittorio Maniezzo – Licensed under CC BY-NC-ND 4.0</a:t>
             </a:r>
-            <a:endParaRPr lang="it-IT" dirty="0"/>
-          </a:p>
-        </p:txBody>
-      </p:sp>
-      <p:sp>
-        <p:nvSpPr>
-          <p:cNvPr id="5" name="Slide Number Placeholder 4">
-            <a:extLst>
-              <a:ext uri="{FF2B5EF4-FFF2-40B4-BE49-F238E27FC236}">
-                <a16:creationId xmlns:a16="http://schemas.microsoft.com/office/drawing/2014/main" id="{99049264-BD2E-4C82-875E-17BBBDD145CA}"/>
-              </a:ext>
-            </a:extLst>
-          </p:cNvPr>
-          <p:cNvSpPr>
-            <a:spLocks noGrp="1"/>
-          </p:cNvSpPr>
-          <p:nvPr>
-            <p:ph type="sldNum" sz="quarter" idx="4"/>
-          </p:nvPr>
-        </p:nvSpPr>
-        <p:spPr/>
-        <p:txBody>
-          <a:bodyPr/>
-          <a:lstStyle/>
-          <a:p>
-            <a:pPr>
-              <a:defRPr/>
-            </a:pPr>
-            <a:fld id="{476DEB1C-3253-4C07-8F02-456B7B2AD41D}" type="slidenum">
-              <a:rPr lang="it-IT" smtClean="0"/>
-              <a:pPr>
-                <a:defRPr/>
-              </a:pPr>
-              <a:t>11</a:t>
-            </a:fld>
             <a:endParaRPr lang="it-IT" dirty="0"/>
           </a:p>
         </p:txBody>
@@ -31816,43 +32150,8 @@
             </a:pPr>
             <a:r>
               <a:rPr lang="it-IT"/>
-              <a:t>Vittorio Maniezzo - University of Bologna</a:t>
+              <a:t>© 2026 Vittorio Maniezzo – Licensed under CC BY-NC-ND 4.0</a:t>
             </a:r>
-            <a:endParaRPr lang="it-IT" dirty="0"/>
-          </a:p>
-        </p:txBody>
-      </p:sp>
-      <p:sp>
-        <p:nvSpPr>
-          <p:cNvPr id="5" name="Slide Number Placeholder 4">
-            <a:extLst>
-              <a:ext uri="{FF2B5EF4-FFF2-40B4-BE49-F238E27FC236}">
-                <a16:creationId xmlns:a16="http://schemas.microsoft.com/office/drawing/2014/main" id="{02F5D5DA-8A2D-4E43-B27A-2FA2054E5BEE}"/>
-              </a:ext>
-            </a:extLst>
-          </p:cNvPr>
-          <p:cNvSpPr>
-            <a:spLocks noGrp="1"/>
-          </p:cNvSpPr>
-          <p:nvPr>
-            <p:ph type="sldNum" sz="quarter" idx="4"/>
-          </p:nvPr>
-        </p:nvSpPr>
-        <p:spPr/>
-        <p:txBody>
-          <a:bodyPr/>
-          <a:lstStyle/>
-          <a:p>
-            <a:pPr>
-              <a:defRPr/>
-            </a:pPr>
-            <a:fld id="{476DEB1C-3253-4C07-8F02-456B7B2AD41D}" type="slidenum">
-              <a:rPr lang="it-IT" smtClean="0"/>
-              <a:pPr>
-                <a:defRPr/>
-              </a:pPr>
-              <a:t>12</a:t>
-            </a:fld>
             <a:endParaRPr lang="it-IT" dirty="0"/>
           </a:p>
         </p:txBody>
@@ -31970,43 +32269,8 @@
             </a:pPr>
             <a:r>
               <a:rPr lang="it-IT"/>
-              <a:t>Vittorio Maniezzo - University of Bologna</a:t>
+              <a:t>© 2026 Vittorio Maniezzo – Licensed under CC BY-NC-ND 4.0</a:t>
             </a:r>
-            <a:endParaRPr lang="it-IT" dirty="0"/>
-          </a:p>
-        </p:txBody>
-      </p:sp>
-      <p:sp>
-        <p:nvSpPr>
-          <p:cNvPr id="5" name="Slide Number Placeholder 4">
-            <a:extLst>
-              <a:ext uri="{FF2B5EF4-FFF2-40B4-BE49-F238E27FC236}">
-                <a16:creationId xmlns:a16="http://schemas.microsoft.com/office/drawing/2014/main" id="{AFA558D8-0653-48AF-BA12-460CCF0164E0}"/>
-              </a:ext>
-            </a:extLst>
-          </p:cNvPr>
-          <p:cNvSpPr>
-            <a:spLocks noGrp="1"/>
-          </p:cNvSpPr>
-          <p:nvPr>
-            <p:ph type="sldNum" sz="quarter" idx="4"/>
-          </p:nvPr>
-        </p:nvSpPr>
-        <p:spPr/>
-        <p:txBody>
-          <a:bodyPr/>
-          <a:lstStyle/>
-          <a:p>
-            <a:pPr>
-              <a:defRPr/>
-            </a:pPr>
-            <a:fld id="{476DEB1C-3253-4C07-8F02-456B7B2AD41D}" type="slidenum">
-              <a:rPr lang="it-IT" smtClean="0"/>
-              <a:pPr>
-                <a:defRPr/>
-              </a:pPr>
-              <a:t>13</a:t>
-            </a:fld>
             <a:endParaRPr lang="it-IT" dirty="0"/>
           </a:p>
         </p:txBody>
@@ -32124,43 +32388,8 @@
             </a:pPr>
             <a:r>
               <a:rPr lang="it-IT"/>
-              <a:t>Vittorio Maniezzo - University of Bologna</a:t>
+              <a:t>© 2026 Vittorio Maniezzo – Licensed under CC BY-NC-ND 4.0</a:t>
             </a:r>
-            <a:endParaRPr lang="it-IT" dirty="0"/>
-          </a:p>
-        </p:txBody>
-      </p:sp>
-      <p:sp>
-        <p:nvSpPr>
-          <p:cNvPr id="5" name="Slide Number Placeholder 4">
-            <a:extLst>
-              <a:ext uri="{FF2B5EF4-FFF2-40B4-BE49-F238E27FC236}">
-                <a16:creationId xmlns:a16="http://schemas.microsoft.com/office/drawing/2014/main" id="{2023C0DC-6770-42A8-A70F-7914297B320D}"/>
-              </a:ext>
-            </a:extLst>
-          </p:cNvPr>
-          <p:cNvSpPr>
-            <a:spLocks noGrp="1"/>
-          </p:cNvSpPr>
-          <p:nvPr>
-            <p:ph type="sldNum" sz="quarter" idx="4"/>
-          </p:nvPr>
-        </p:nvSpPr>
-        <p:spPr/>
-        <p:txBody>
-          <a:bodyPr/>
-          <a:lstStyle/>
-          <a:p>
-            <a:pPr>
-              <a:defRPr/>
-            </a:pPr>
-            <a:fld id="{476DEB1C-3253-4C07-8F02-456B7B2AD41D}" type="slidenum">
-              <a:rPr lang="it-IT" smtClean="0"/>
-              <a:pPr>
-                <a:defRPr/>
-              </a:pPr>
-              <a:t>14</a:t>
-            </a:fld>
             <a:endParaRPr lang="it-IT" dirty="0"/>
           </a:p>
         </p:txBody>
@@ -32245,7 +32474,7 @@
             <a:r>
               <a:rPr lang="it-IT" sz="2400" dirty="0" err="1">
                 <a:solidFill>
-                  <a:schemeClr val="accent2"/>
+                  <a:srgbClr val="CD3131"/>
                 </a:solidFill>
               </a:rPr>
               <a:t>changepoint</a:t>
@@ -32253,7 +32482,7 @@
             <a:r>
               <a:rPr lang="it-IT" sz="2400" dirty="0">
                 <a:solidFill>
-                  <a:schemeClr val="accent2"/>
+                  <a:srgbClr val="CD3131"/>
                 </a:solidFill>
               </a:rPr>
               <a:t> </a:t>
@@ -32261,7 +32490,7 @@
             <a:r>
               <a:rPr lang="it-IT" sz="2400" dirty="0" err="1">
                 <a:solidFill>
-                  <a:schemeClr val="accent2"/>
+                  <a:srgbClr val="CD3131"/>
                 </a:solidFill>
               </a:rPr>
               <a:t>detection</a:t>
@@ -32269,7 +32498,7 @@
             <a:r>
               <a:rPr lang="it-IT" sz="2400" dirty="0">
                 <a:solidFill>
-                  <a:schemeClr val="accent2"/>
+                  <a:srgbClr val="CD3131"/>
                 </a:solidFill>
               </a:rPr>
               <a:t> </a:t>
@@ -32295,7 +32524,7 @@
             <a:r>
               <a:rPr lang="en-US" sz="2400" dirty="0">
                 <a:solidFill>
-                  <a:schemeClr val="accent2"/>
+                  <a:srgbClr val="CD3131"/>
                 </a:solidFill>
               </a:rPr>
               <a:t>linear piecewise approximation</a:t>
@@ -32313,7 +32542,7 @@
             <a:r>
               <a:rPr lang="en-US" sz="2400" dirty="0">
                 <a:solidFill>
-                  <a:schemeClr val="accent2"/>
+                  <a:srgbClr val="CD3131"/>
                 </a:solidFill>
               </a:rPr>
               <a:t>ruptures package </a:t>
@@ -32326,7 +32555,7 @@
           <a:p>
             <a:pPr marL="342900" indent="-342900">
               <a:spcBef>
-                <a:spcPts val="0"/>
+                <a:spcPts val="600"/>
               </a:spcBef>
               <a:buFont typeface="Arial" panose="020B0604020202020204" pitchFamily="34" charset="0"/>
               <a:buChar char="•"/>
@@ -32343,7 +32572,7 @@
           <a:p>
             <a:pPr marL="342900" indent="-342900">
               <a:spcBef>
-                <a:spcPts val="0"/>
+                <a:spcPts val="600"/>
               </a:spcBef>
               <a:buFont typeface="Arial" panose="020B0604020202020204" pitchFamily="34" charset="0"/>
               <a:buChar char="•"/>
@@ -32422,45 +32651,17 @@
               <a:defRPr/>
             </a:pPr>
             <a:r>
-              <a:rPr lang="it-IT"/>
-              <a:t>Vittorio Maniezzo - University of Bologna</a:t>
+              <a:rPr lang="it-IT" dirty="0"/>
+              <a:t>© 2026 Vittorio Maniezzo – </a:t>
             </a:r>
-            <a:endParaRPr lang="it-IT" dirty="0"/>
-          </a:p>
-        </p:txBody>
-      </p:sp>
-      <p:sp>
-        <p:nvSpPr>
-          <p:cNvPr id="5" name="Slide Number Placeholder 4">
-            <a:extLst>
-              <a:ext uri="{FF2B5EF4-FFF2-40B4-BE49-F238E27FC236}">
-                <a16:creationId xmlns:a16="http://schemas.microsoft.com/office/drawing/2014/main" id="{B3EF2CD6-D9BD-4733-FAE9-2127F064961D}"/>
-              </a:ext>
-            </a:extLst>
-          </p:cNvPr>
-          <p:cNvSpPr>
-            <a:spLocks noGrp="1"/>
-          </p:cNvSpPr>
-          <p:nvPr>
-            <p:ph type="sldNum" sz="quarter" idx="4"/>
-          </p:nvPr>
-        </p:nvSpPr>
-        <p:spPr/>
-        <p:txBody>
-          <a:bodyPr/>
-          <a:lstStyle/>
-          <a:p>
-            <a:pPr>
-              <a:defRPr/>
-            </a:pPr>
-            <a:fld id="{476DEB1C-3253-4C07-8F02-456B7B2AD41D}" type="slidenum">
-              <a:rPr lang="it-IT" smtClean="0"/>
-              <a:pPr>
-                <a:defRPr/>
-              </a:pPr>
-              <a:t>2</a:t>
-            </a:fld>
-            <a:endParaRPr lang="it-IT" dirty="0"/>
+            <a:r>
+              <a:rPr lang="it-IT" dirty="0" err="1"/>
+              <a:t>Licensed</a:t>
+            </a:r>
+            <a:r>
+              <a:rPr lang="it-IT" dirty="0"/>
+              <a:t> under CC BY-NC-ND 4.0</a:t>
+            </a:r>
           </a:p>
         </p:txBody>
       </p:sp>
@@ -32525,14 +32726,22 @@
             <a:r>
               <a:rPr lang="en-US" sz="2200" b="1" dirty="0">
                 <a:solidFill>
-                  <a:schemeClr val="accent2"/>
+                  <a:srgbClr val="CD3131"/>
                 </a:solidFill>
               </a:rPr>
               <a:t>Changepoint detection </a:t>
             </a:r>
             <a:r>
               <a:rPr lang="en-US" sz="2200" dirty="0"/>
-              <a:t>assumes a finite number of shifts, each permanent (the series settles into a new regime and doesn't return to the old one).</a:t>
+              <a:t>assumes a finite number of shifts, </a:t>
+            </a:r>
+            <a:r>
+              <a:rPr lang="en-US" sz="2200" i="1" dirty="0"/>
+              <a:t>each permanent </a:t>
+            </a:r>
+            <a:r>
+              <a:rPr lang="en-US" sz="2200" dirty="0"/>
+              <a:t>(the series settles into a new regime and doesn't return to the old one).</a:t>
             </a:r>
           </a:p>
           <a:p>
@@ -32544,14 +32753,30 @@
             <a:r>
               <a:rPr lang="en-US" sz="2200" b="1" dirty="0">
                 <a:solidFill>
-                  <a:schemeClr val="accent2"/>
+                  <a:srgbClr val="CD3131"/>
                 </a:solidFill>
               </a:rPr>
-              <a:t>Regime-switching </a:t>
+              <a:t>Regime-switching</a:t>
+            </a:r>
+            <a:r>
+              <a:rPr lang="en-US" sz="2200" dirty="0">
+                <a:solidFill>
+                  <a:srgbClr val="CD3131"/>
+                </a:solidFill>
+              </a:rPr>
+              <a:t> </a:t>
             </a:r>
             <a:r>
               <a:rPr lang="en-US" sz="2200" dirty="0"/>
-              <a:t>models allow the process to revisit earlier regimes, with switches governed by some rule rather than treated as isolated breaks.</a:t>
+              <a:t>models allow the process to revisit earlier regimes, with switches </a:t>
+            </a:r>
+            <a:r>
+              <a:rPr lang="en-US" sz="2200" i="1" dirty="0"/>
+              <a:t>governed by some rule rather than treated as isolated breaks</a:t>
+            </a:r>
+            <a:r>
+              <a:rPr lang="en-US" sz="2200" dirty="0"/>
+              <a:t>.</a:t>
             </a:r>
           </a:p>
           <a:p>
@@ -32576,14 +32801,14 @@
             <a:r>
               <a:rPr lang="en-US" sz="2200" dirty="0">
                 <a:solidFill>
-                  <a:schemeClr val="accent2"/>
+                  <a:srgbClr val="CD3131"/>
                 </a:solidFill>
               </a:rPr>
-              <a:t>Threshold-based</a:t>
+              <a:t>Threshold-based </a:t>
             </a:r>
             <a:r>
               <a:rPr lang="en-US" sz="2200" dirty="0"/>
-              <a:t> (</a:t>
+              <a:t>(</a:t>
             </a:r>
             <a:r>
               <a:rPr lang="en-US" sz="2200" i="1" dirty="0"/>
@@ -32591,7 +32816,23 @@
             </a:r>
             <a:r>
               <a:rPr lang="en-US" sz="2200" dirty="0"/>
-              <a:t>). SETAR (Tong 1978/1990), TAR, STAR: the AR regime in force at time t is determined by whether a lagged value of the series crosses a threshold (or smoothly transitions in case of STAR).</a:t>
+              <a:t>). SETAR (Tong 1978/1990), TAR, STAR: the AR regime in force at time </a:t>
+            </a:r>
+            <a:r>
+              <a:rPr lang="en-US" sz="2200" i="1" dirty="0"/>
+              <a:t>t</a:t>
+            </a:r>
+            <a:r>
+              <a:rPr lang="en-US" sz="2200" dirty="0"/>
+              <a:t> is determined by whether a lagged value of the series </a:t>
+            </a:r>
+            <a:r>
+              <a:rPr lang="en-US" sz="2200" i="1" dirty="0"/>
+              <a:t>crosses a threshold </a:t>
+            </a:r>
+            <a:r>
+              <a:rPr lang="en-US" sz="2200" dirty="0"/>
+              <a:t>(or smoothly transitions in case of STAR).</a:t>
             </a:r>
           </a:p>
           <a:p>
@@ -32605,14 +32846,14 @@
             <a:r>
               <a:rPr lang="en-US" sz="2200" dirty="0">
                 <a:solidFill>
-                  <a:schemeClr val="accent2"/>
+                  <a:srgbClr val="CD3131"/>
                 </a:solidFill>
               </a:rPr>
-              <a:t>Markov-switching</a:t>
+              <a:t>Markov-switching </a:t>
             </a:r>
             <a:r>
               <a:rPr lang="en-US" sz="2200" dirty="0"/>
-              <a:t> (</a:t>
+              <a:t>(</a:t>
             </a:r>
             <a:r>
               <a:rPr lang="en-US" sz="2200" i="1" dirty="0"/>
@@ -32620,7 +32861,15 @@
             </a:r>
             <a:r>
               <a:rPr lang="en-US" sz="2200" dirty="0"/>
-              <a:t>). Markov-Switching Autoregressive model (Hamilton, 1989): regime is an unobserved discrete state following a Markov chain. Used for business-cycle identification (expansion / recession) and, in finance, for volatility regimes.</a:t>
+              <a:t>). Markov-Switching Autoregressive model (Hamilton, 1989): regime is an </a:t>
+            </a:r>
+            <a:r>
+              <a:rPr lang="en-US" sz="2200" i="1" dirty="0"/>
+              <a:t>unobserved discrete state </a:t>
+            </a:r>
+            <a:r>
+              <a:rPr lang="en-US" sz="2200" dirty="0"/>
+              <a:t>following a Markov chain. Used for business-cycle identification (expansion / recession) and, in finance, for volatility regimes.</a:t>
             </a:r>
           </a:p>
         </p:txBody>
@@ -32683,45 +32932,17 @@
               <a:defRPr/>
             </a:pPr>
             <a:r>
-              <a:rPr lang="it-IT"/>
-              <a:t>Vittorio Maniezzo - University of Bologna</a:t>
+              <a:rPr lang="it-IT" dirty="0"/>
+              <a:t>© 2026 Vittorio Maniezzo – </a:t>
             </a:r>
-            <a:endParaRPr lang="it-IT" dirty="0"/>
-          </a:p>
-        </p:txBody>
-      </p:sp>
-      <p:sp>
-        <p:nvSpPr>
-          <p:cNvPr id="5" name="Slide Number Placeholder 4">
-            <a:extLst>
-              <a:ext uri="{FF2B5EF4-FFF2-40B4-BE49-F238E27FC236}">
-                <a16:creationId xmlns:a16="http://schemas.microsoft.com/office/drawing/2014/main" id="{EB7314E3-C629-6B24-C7F7-BA376C4EF13D}"/>
-              </a:ext>
-            </a:extLst>
-          </p:cNvPr>
-          <p:cNvSpPr>
-            <a:spLocks noGrp="1"/>
-          </p:cNvSpPr>
-          <p:nvPr>
-            <p:ph type="sldNum" sz="quarter" idx="4"/>
-          </p:nvPr>
-        </p:nvSpPr>
-        <p:spPr/>
-        <p:txBody>
-          <a:bodyPr/>
-          <a:lstStyle/>
-          <a:p>
-            <a:pPr>
-              <a:defRPr/>
-            </a:pPr>
-            <a:fld id="{476DEB1C-3253-4C07-8F02-456B7B2AD41D}" type="slidenum">
-              <a:rPr lang="it-IT" smtClean="0"/>
-              <a:pPr>
-                <a:defRPr/>
-              </a:pPr>
-              <a:t>3</a:t>
-            </a:fld>
-            <a:endParaRPr lang="it-IT" dirty="0"/>
+            <a:r>
+              <a:rPr lang="it-IT" dirty="0" err="1"/>
+              <a:t>Licensed</a:t>
+            </a:r>
+            <a:r>
+              <a:rPr lang="it-IT" dirty="0"/>
+              <a:t> under CC BY-NC-ND 4.0</a:t>
+            </a:r>
           </a:p>
         </p:txBody>
       </p:sp>
@@ -32795,14 +33016,22 @@
             <a:r>
               <a:rPr lang="en-US" sz="2000" b="1" dirty="0">
                 <a:solidFill>
-                  <a:schemeClr val="accent2"/>
+                  <a:srgbClr val="CD3131"/>
                 </a:solidFill>
               </a:rPr>
               <a:t>both to model active regimes in the past and forecast future behavior</a:t>
             </a:r>
             <a:r>
+              <a:rPr lang="en-US" sz="2000" dirty="0">
+                <a:solidFill>
+                  <a:srgbClr val="CD3131"/>
+                </a:solidFill>
+              </a:rPr>
+              <a:t> </a:t>
+            </a:r>
+            <a:r>
               <a:rPr lang="en-US" sz="2000" dirty="0"/>
-              <a:t> is largely unexplored.</a:t>
+              <a:t>is largely unexplored.</a:t>
             </a:r>
           </a:p>
           <a:p>
@@ -32818,7 +33047,7 @@
             <a:r>
               <a:rPr lang="en-US" sz="2000" dirty="0">
                 <a:solidFill>
-                  <a:schemeClr val="accent2"/>
+                  <a:srgbClr val="CD3131"/>
                 </a:solidFill>
               </a:rPr>
               <a:t>model the time series in-sample</a:t>
@@ -32830,7 +33059,7 @@
             <a:r>
               <a:rPr lang="en-US" sz="2000" dirty="0">
                 <a:solidFill>
-                  <a:schemeClr val="accent2"/>
+                  <a:srgbClr val="CD3131"/>
                 </a:solidFill>
               </a:rPr>
               <a:t>no out-of-sample </a:t>
@@ -32925,7 +33154,7 @@
             <a:r>
               <a:rPr lang="en-US" sz="2000" b="1" i="1" dirty="0">
                 <a:solidFill>
-                  <a:schemeClr val="accent2"/>
+                  <a:srgbClr val="CD3131"/>
                 </a:solidFill>
               </a:rPr>
               <a:t>identify time segments using the predictive accuracy of a forecasting model </a:t>
@@ -32999,43 +33228,8 @@
             </a:pPr>
             <a:r>
               <a:rPr lang="it-IT"/>
-              <a:t>Vittorio Maniezzo - University of Bologna</a:t>
+              <a:t>© 2026 Vittorio Maniezzo – Licensed under CC BY-NC-ND 4.0</a:t>
             </a:r>
-            <a:endParaRPr lang="it-IT" dirty="0"/>
-          </a:p>
-        </p:txBody>
-      </p:sp>
-      <p:sp>
-        <p:nvSpPr>
-          <p:cNvPr id="5" name="Slide Number Placeholder 4">
-            <a:extLst>
-              <a:ext uri="{FF2B5EF4-FFF2-40B4-BE49-F238E27FC236}">
-                <a16:creationId xmlns:a16="http://schemas.microsoft.com/office/drawing/2014/main" id="{6F12120D-E22B-84A0-BB50-666DBE375E8B}"/>
-              </a:ext>
-            </a:extLst>
-          </p:cNvPr>
-          <p:cNvSpPr>
-            <a:spLocks noGrp="1"/>
-          </p:cNvSpPr>
-          <p:nvPr>
-            <p:ph type="sldNum" sz="quarter" idx="4"/>
-          </p:nvPr>
-        </p:nvSpPr>
-        <p:spPr/>
-        <p:txBody>
-          <a:bodyPr/>
-          <a:lstStyle/>
-          <a:p>
-            <a:pPr>
-              <a:defRPr/>
-            </a:pPr>
-            <a:fld id="{476DEB1C-3253-4C07-8F02-456B7B2AD41D}" type="slidenum">
-              <a:rPr lang="it-IT" smtClean="0"/>
-              <a:pPr>
-                <a:defRPr/>
-              </a:pPr>
-              <a:t>4</a:t>
-            </a:fld>
             <a:endParaRPr lang="it-IT" dirty="0"/>
           </a:p>
         </p:txBody>
@@ -33102,14 +33296,14 @@
                 <a:r>
                   <a:rPr lang="en-US" sz="2400" dirty="0">
                     <a:solidFill>
-                      <a:schemeClr val="accent2"/>
+                      <a:srgbClr val="CD3131"/>
                     </a:solidFill>
                   </a:rPr>
-                  <a:t>generate all feasible time segments</a:t>
+                  <a:t>generate all feasible time segments </a:t>
                 </a:r>
                 <a:r>
                   <a:rPr lang="en-US" sz="2400" dirty="0"/>
-                  <a:t> (suitable length and other segment-level constraints).</a:t>
+                  <a:t>(suitable length and other segment-level constraints).</a:t>
                 </a:r>
               </a:p>
               <a:p>
@@ -33120,7 +33314,7 @@
                 <a:r>
                   <a:rPr lang="en-US" sz="2400" dirty="0">
                     <a:solidFill>
-                      <a:schemeClr val="accent2"/>
+                      <a:srgbClr val="CD3131"/>
                     </a:solidFill>
                   </a:rPr>
                   <a:t>apply the forecasting model </a:t>
@@ -33138,14 +33332,14 @@
                 <a:r>
                   <a:rPr lang="en-US" sz="2400" dirty="0">
                     <a:solidFill>
-                      <a:schemeClr val="accent2"/>
+                      <a:srgbClr val="CD3131"/>
                     </a:solidFill>
                   </a:rPr>
-                  <a:t>cost</a:t>
+                  <a:t>cost is the RMSE </a:t>
                 </a:r>
                 <a:r>
                   <a:rPr lang="en-US" sz="2400" dirty="0"/>
-                  <a:t> is the RMSE of the forecast </a:t>
+                  <a:t>of the forecast </a:t>
                 </a:r>
                 <a:r>
                   <a:rPr lang="en-US" sz="2400" i="1" dirty="0"/>
@@ -33164,7 +33358,7 @@
                 <a:r>
                   <a:rPr lang="en-US" sz="2400" dirty="0">
                     <a:solidFill>
-                      <a:schemeClr val="accent2"/>
+                      <a:srgbClr val="CD3131"/>
                     </a:solidFill>
                   </a:rPr>
                   <a:t>subset of segments  that collectively partitions </a:t>
@@ -33176,7 +33370,7 @@
                 <a:r>
                   <a:rPr lang="en-US" sz="2400" b="1" dirty="0">
                     <a:solidFill>
-                      <a:schemeClr val="accent2"/>
+                      <a:srgbClr val="CD3131"/>
                     </a:solidFill>
                   </a:rPr>
                   <a:t>SPP-like formulation</a:t>
@@ -33732,43 +33926,8 @@
             </a:pPr>
             <a:r>
               <a:rPr lang="it-IT"/>
-              <a:t>Vittorio Maniezzo - University of Bologna</a:t>
+              <a:t>© 2026 Vittorio Maniezzo – Licensed under CC BY-NC-ND 4.0</a:t>
             </a:r>
-            <a:endParaRPr lang="it-IT" dirty="0"/>
-          </a:p>
-        </p:txBody>
-      </p:sp>
-      <p:sp>
-        <p:nvSpPr>
-          <p:cNvPr id="5" name="Slide Number Placeholder 4">
-            <a:extLst>
-              <a:ext uri="{FF2B5EF4-FFF2-40B4-BE49-F238E27FC236}">
-                <a16:creationId xmlns:a16="http://schemas.microsoft.com/office/drawing/2014/main" id="{AF8184F4-9DD8-E80A-4651-91B3E58DC8F7}"/>
-              </a:ext>
-            </a:extLst>
-          </p:cNvPr>
-          <p:cNvSpPr>
-            <a:spLocks noGrp="1"/>
-          </p:cNvSpPr>
-          <p:nvPr>
-            <p:ph type="sldNum" sz="quarter" idx="4"/>
-          </p:nvPr>
-        </p:nvSpPr>
-        <p:spPr/>
-        <p:txBody>
-          <a:bodyPr/>
-          <a:lstStyle/>
-          <a:p>
-            <a:pPr>
-              <a:defRPr/>
-            </a:pPr>
-            <a:fld id="{476DEB1C-3253-4C07-8F02-456B7B2AD41D}" type="slidenum">
-              <a:rPr lang="it-IT" smtClean="0"/>
-              <a:pPr>
-                <a:defRPr/>
-              </a:pPr>
-              <a:t>5</a:t>
-            </a:fld>
             <a:endParaRPr lang="it-IT" dirty="0"/>
           </a:p>
         </p:txBody>
@@ -33823,7 +33982,7 @@
             </p:nvSpPr>
             <p:spPr>
               <a:xfrm>
-                <a:off x="298907" y="1112372"/>
+                <a:off x="298907" y="1085996"/>
                 <a:ext cx="8546175" cy="5646806"/>
               </a:xfrm>
             </p:spPr>
@@ -33856,7 +34015,7 @@
                 <a:r>
                   <a:rPr lang="it-IT" dirty="0">
                     <a:solidFill>
-                      <a:schemeClr val="accent2"/>
+                      <a:srgbClr val="CD3131"/>
                     </a:solidFill>
                   </a:rPr>
                   <a:t>non linear</a:t>
@@ -34740,7 +34899,7 @@
                 <a:r>
                   <a:rPr lang="it-IT" b="1" i="1" dirty="0" err="1">
                     <a:solidFill>
-                      <a:schemeClr val="accent2"/>
+                      <a:srgbClr val="CD3131"/>
                     </a:solidFill>
                   </a:rPr>
                   <a:t>superlinear</a:t>
@@ -34812,13 +34971,13 @@
             </p:nvSpPr>
             <p:spPr>
               <a:xfrm>
-                <a:off x="298907" y="1112372"/>
+                <a:off x="298907" y="1085996"/>
                 <a:ext cx="8546175" cy="5646806"/>
               </a:xfrm>
               <a:blipFill>
                 <a:blip r:embed="rId2"/>
                 <a:stretch>
-                  <a:fillRect l="-1284" t="-863"/>
+                  <a:fillRect l="-1284" t="-864"/>
                 </a:stretch>
               </a:blipFill>
             </p:spPr>
@@ -34904,43 +35063,8 @@
             </a:pPr>
             <a:r>
               <a:rPr lang="it-IT"/>
-              <a:t>Vittorio Maniezzo - University of Bologna</a:t>
+              <a:t>© 2026 Vittorio Maniezzo – Licensed under CC BY-NC-ND 4.0</a:t>
             </a:r>
-            <a:endParaRPr lang="it-IT" dirty="0"/>
-          </a:p>
-        </p:txBody>
-      </p:sp>
-      <p:sp>
-        <p:nvSpPr>
-          <p:cNvPr id="5" name="Slide Number Placeholder 4">
-            <a:extLst>
-              <a:ext uri="{FF2B5EF4-FFF2-40B4-BE49-F238E27FC236}">
-                <a16:creationId xmlns:a16="http://schemas.microsoft.com/office/drawing/2014/main" id="{2993DF63-2153-9ED3-67EA-84195BB1B947}"/>
-              </a:ext>
-            </a:extLst>
-          </p:cNvPr>
-          <p:cNvSpPr>
-            <a:spLocks noGrp="1"/>
-          </p:cNvSpPr>
-          <p:nvPr>
-            <p:ph type="sldNum" sz="quarter" idx="4"/>
-          </p:nvPr>
-        </p:nvSpPr>
-        <p:spPr/>
-        <p:txBody>
-          <a:bodyPr/>
-          <a:lstStyle/>
-          <a:p>
-            <a:pPr>
-              <a:defRPr/>
-            </a:pPr>
-            <a:fld id="{476DEB1C-3253-4C07-8F02-456B7B2AD41D}" type="slidenum">
-              <a:rPr lang="it-IT" smtClean="0"/>
-              <a:pPr>
-                <a:defRPr/>
-              </a:pPr>
-              <a:t>6</a:t>
-            </a:fld>
             <a:endParaRPr lang="it-IT" dirty="0"/>
           </a:p>
         </p:txBody>
@@ -35018,7 +35142,7 @@
             <a:r>
               <a:rPr lang="en-US" sz="2600" dirty="0">
                 <a:solidFill>
-                  <a:srgbClr val="C00000"/>
+                  <a:srgbClr val="CD3131"/>
                 </a:solidFill>
               </a:rPr>
               <a:t>M competitions</a:t>
@@ -35026,7 +35150,7 @@
             <a:r>
               <a:rPr lang="en-US" sz="2600" i="1" baseline="30000" dirty="0">
                 <a:solidFill>
-                  <a:srgbClr val="C00000"/>
+                  <a:srgbClr val="CD3131"/>
                 </a:solidFill>
               </a:rPr>
               <a:t>1</a:t>
@@ -35034,7 +35158,7 @@
             <a:r>
               <a:rPr lang="en-US" sz="2600" dirty="0">
                 <a:solidFill>
-                  <a:srgbClr val="C00000"/>
+                  <a:srgbClr val="CD3131"/>
                 </a:solidFill>
               </a:rPr>
               <a:t> </a:t>
@@ -35100,7 +35224,7 @@
             <a:r>
               <a:rPr lang="en-US" sz="2600" dirty="0">
                 <a:solidFill>
-                  <a:schemeClr val="accent2"/>
+                  <a:srgbClr val="CD3131"/>
                 </a:solidFill>
               </a:rPr>
               <a:t>AR(1), ETS Holt-Winters, theta, random forest</a:t>
@@ -35226,43 +35350,8 @@
             </a:pPr>
             <a:r>
               <a:rPr lang="it-IT"/>
-              <a:t>Vittorio Maniezzo - University of Bologna</a:t>
+              <a:t>© 2026 Vittorio Maniezzo – Licensed under CC BY-NC-ND 4.0</a:t>
             </a:r>
-            <a:endParaRPr lang="it-IT" dirty="0"/>
-          </a:p>
-        </p:txBody>
-      </p:sp>
-      <p:sp>
-        <p:nvSpPr>
-          <p:cNvPr id="5" name="Slide Number Placeholder 4">
-            <a:extLst>
-              <a:ext uri="{FF2B5EF4-FFF2-40B4-BE49-F238E27FC236}">
-                <a16:creationId xmlns:a16="http://schemas.microsoft.com/office/drawing/2014/main" id="{E7A0E8CF-948D-D45B-4090-98FC2F230005}"/>
-              </a:ext>
-            </a:extLst>
-          </p:cNvPr>
-          <p:cNvSpPr>
-            <a:spLocks noGrp="1"/>
-          </p:cNvSpPr>
-          <p:nvPr>
-            <p:ph type="sldNum" sz="quarter" idx="4"/>
-          </p:nvPr>
-        </p:nvSpPr>
-        <p:spPr/>
-        <p:txBody>
-          <a:bodyPr/>
-          <a:lstStyle/>
-          <a:p>
-            <a:pPr>
-              <a:defRPr/>
-            </a:pPr>
-            <a:fld id="{476DEB1C-3253-4C07-8F02-456B7B2AD41D}" type="slidenum">
-              <a:rPr lang="it-IT" smtClean="0"/>
-              <a:pPr>
-                <a:defRPr/>
-              </a:pPr>
-              <a:t>7</a:t>
-            </a:fld>
             <a:endParaRPr lang="it-IT" dirty="0"/>
           </a:p>
         </p:txBody>
@@ -45373,43 +45462,16 @@
             </a:pPr>
             <a:r>
               <a:rPr lang="it-IT" dirty="0"/>
-              <a:t>Vittorio Maniezzo - University of Bologna</a:t>
+              <a:t>© 2026 Vittorio Maniezzo – </a:t>
             </a:r>
-          </a:p>
-        </p:txBody>
-      </p:sp>
-      <p:sp>
-        <p:nvSpPr>
-          <p:cNvPr id="5" name="Slide Number Placeholder 4">
-            <a:extLst>
-              <a:ext uri="{FF2B5EF4-FFF2-40B4-BE49-F238E27FC236}">
-                <a16:creationId xmlns:a16="http://schemas.microsoft.com/office/drawing/2014/main" id="{309E3A49-A33C-4800-A0BC-BDB74A3EA8AD}"/>
-              </a:ext>
-            </a:extLst>
-          </p:cNvPr>
-          <p:cNvSpPr>
-            <a:spLocks noGrp="1"/>
-          </p:cNvSpPr>
-          <p:nvPr>
-            <p:ph type="sldNum" sz="quarter" idx="4"/>
-          </p:nvPr>
-        </p:nvSpPr>
-        <p:spPr/>
-        <p:txBody>
-          <a:bodyPr/>
-          <a:lstStyle/>
-          <a:p>
-            <a:pPr>
-              <a:defRPr/>
-            </a:pPr>
-            <a:fld id="{476DEB1C-3253-4C07-8F02-456B7B2AD41D}" type="slidenum">
-              <a:rPr lang="it-IT" smtClean="0"/>
-              <a:pPr>
-                <a:defRPr/>
-              </a:pPr>
-              <a:t>8</a:t>
-            </a:fld>
-            <a:endParaRPr lang="it-IT" dirty="0"/>
+            <a:r>
+              <a:rPr lang="it-IT" dirty="0" err="1"/>
+              <a:t>Licensed</a:t>
+            </a:r>
+            <a:r>
+              <a:rPr lang="it-IT" dirty="0"/>
+              <a:t> under CC BY-NC-ND 4.0</a:t>
+            </a:r>
           </a:p>
         </p:txBody>
       </p:sp>
@@ -45446,7 +45508,19 @@
           <a:p>
             <a:r>
               <a:rPr lang="en-US" sz="1600" dirty="0"/>
-              <a:t>Segmentation gains are model‑dependent. One can either select the model that maximizes average error reduction (with low variance), or — for a given model — use the empirical distribution of gains to anticipate the benefit of segmentation.</a:t>
+              <a:t>Segmentation </a:t>
+            </a:r>
+            <a:r>
+              <a:rPr lang="en-US" sz="1600" dirty="0">
+                <a:solidFill>
+                  <a:srgbClr val="CD3131"/>
+                </a:solidFill>
+              </a:rPr>
+              <a:t>gains are model‑dependent</a:t>
+            </a:r>
+            <a:r>
+              <a:rPr lang="en-US" sz="1600" dirty="0"/>
+              <a:t>. One can either select the model that maximizes average error reduction (with low variance), or — for a given model — use the empirical distribution of gains to anticipate the benefit of segmentation.</a:t>
             </a:r>
           </a:p>
         </p:txBody>
@@ -45564,43 +45638,8 @@
             </a:pPr>
             <a:r>
               <a:rPr lang="it-IT"/>
-              <a:t>Vittorio Maniezzo - University of Bologna</a:t>
+              <a:t>© 2026 Vittorio Maniezzo – Licensed under CC BY-NC-ND 4.0</a:t>
             </a:r>
-            <a:endParaRPr lang="it-IT" dirty="0"/>
-          </a:p>
-        </p:txBody>
-      </p:sp>
-      <p:sp>
-        <p:nvSpPr>
-          <p:cNvPr id="5" name="Slide Number Placeholder 4">
-            <a:extLst>
-              <a:ext uri="{FF2B5EF4-FFF2-40B4-BE49-F238E27FC236}">
-                <a16:creationId xmlns:a16="http://schemas.microsoft.com/office/drawing/2014/main" id="{5B03869C-E3D8-402F-9FA3-133EF8F20AB8}"/>
-              </a:ext>
-            </a:extLst>
-          </p:cNvPr>
-          <p:cNvSpPr>
-            <a:spLocks noGrp="1"/>
-          </p:cNvSpPr>
-          <p:nvPr>
-            <p:ph type="sldNum" sz="quarter" idx="4"/>
-          </p:nvPr>
-        </p:nvSpPr>
-        <p:spPr/>
-        <p:txBody>
-          <a:bodyPr/>
-          <a:lstStyle/>
-          <a:p>
-            <a:pPr>
-              <a:defRPr/>
-            </a:pPr>
-            <a:fld id="{476DEB1C-3253-4C07-8F02-456B7B2AD41D}" type="slidenum">
-              <a:rPr lang="it-IT" smtClean="0"/>
-              <a:pPr>
-                <a:defRPr/>
-              </a:pPr>
-              <a:t>9</a:t>
-            </a:fld>
             <a:endParaRPr lang="it-IT" dirty="0"/>
           </a:p>
         </p:txBody>
@@ -45891,4 +45930,319 @@
     </a:ext>
   </a:extLst>
 </a:theme>
+</file>
+
+<file path=ppt/theme/theme2.xml><?xml version="1.0" encoding="utf-8"?>
+<a:theme xmlns:a="http://schemas.openxmlformats.org/drawingml/2006/main" name="Office Theme">
+  <a:themeElements>
+    <a:clrScheme name="Office">
+      <a:dk1>
+        <a:sysClr val="windowText" lastClr="000000"/>
+      </a:dk1>
+      <a:lt1>
+        <a:sysClr val="window" lastClr="FFFFFF"/>
+      </a:lt1>
+      <a:dk2>
+        <a:srgbClr val="0E2841"/>
+      </a:dk2>
+      <a:lt2>
+        <a:srgbClr val="E8E8E8"/>
+      </a:lt2>
+      <a:accent1>
+        <a:srgbClr val="156082"/>
+      </a:accent1>
+      <a:accent2>
+        <a:srgbClr val="E97132"/>
+      </a:accent2>
+      <a:accent3>
+        <a:srgbClr val="196B24"/>
+      </a:accent3>
+      <a:accent4>
+        <a:srgbClr val="0F9ED5"/>
+      </a:accent4>
+      <a:accent5>
+        <a:srgbClr val="A02B93"/>
+      </a:accent5>
+      <a:accent6>
+        <a:srgbClr val="4EA72E"/>
+      </a:accent6>
+      <a:hlink>
+        <a:srgbClr val="467886"/>
+      </a:hlink>
+      <a:folHlink>
+        <a:srgbClr val="96607D"/>
+      </a:folHlink>
+    </a:clrScheme>
+    <a:fontScheme name="Office">
+      <a:majorFont>
+        <a:latin typeface="Aptos Display" panose="02110004020202020204"/>
+        <a:ea typeface=""/>
+        <a:cs typeface=""/>
+        <a:font script="Jpan" typeface="游ゴシック Light"/>
+        <a:font script="Hang" typeface="맑은 고딕"/>
+        <a:font script="Hans" typeface="等线 Light"/>
+        <a:font script="Hant" typeface="新細明體"/>
+        <a:font script="Arab" typeface="Times New Roman"/>
+        <a:font script="Hebr" typeface="Times New Roman"/>
+        <a:font script="Thai" typeface="Angsana New"/>
+        <a:font script="Ethi" typeface="Nyala"/>
+        <a:font script="Beng" typeface="Vrinda"/>
+        <a:font script="Gujr" typeface="Shruti"/>
+        <a:font script="Khmr" typeface="MoolBoran"/>
+        <a:font script="Knda" typeface="Tunga"/>
+        <a:font script="Guru" typeface="Raavi"/>
+        <a:font script="Cans" typeface="Euphemia"/>
+        <a:font script="Cher" typeface="Plantagenet Cherokee"/>
+        <a:font script="Yiii" typeface="Microsoft Yi Baiti"/>
+        <a:font script="Tibt" typeface="Microsoft Himalaya"/>
+        <a:font script="Thaa" typeface="MV Boli"/>
+        <a:font script="Deva" typeface="Mangal"/>
+        <a:font script="Telu" typeface="Gautami"/>
+        <a:font script="Taml" typeface="Latha"/>
+        <a:font script="Syrc" typeface="Estrangelo Edessa"/>
+        <a:font script="Orya" typeface="Kalinga"/>
+        <a:font script="Mlym" typeface="Kartika"/>
+        <a:font script="Laoo" typeface="DokChampa"/>
+        <a:font script="Sinh" typeface="Iskoola Pota"/>
+        <a:font script="Mong" typeface="Mongolian Baiti"/>
+        <a:font script="Viet" typeface="Times New Roman"/>
+        <a:font script="Uigh" typeface="Microsoft Uighur"/>
+        <a:font script="Geor" typeface="Sylfaen"/>
+        <a:font script="Armn" typeface="Arial"/>
+        <a:font script="Bugi" typeface="Leelawadee UI"/>
+        <a:font script="Bopo" typeface="Microsoft JhengHei"/>
+        <a:font script="Java" typeface="Javanese Text"/>
+        <a:font script="Lisu" typeface="Segoe UI"/>
+        <a:font script="Mymr" typeface="Myanmar Text"/>
+        <a:font script="Nkoo" typeface="Ebrima"/>
+        <a:font script="Olck" typeface="Nirmala UI"/>
+        <a:font script="Osma" typeface="Ebrima"/>
+        <a:font script="Phag" typeface="Phagspa"/>
+        <a:font script="Syrn" typeface="Estrangelo Edessa"/>
+        <a:font script="Syrj" typeface="Estrangelo Edessa"/>
+        <a:font script="Syre" typeface="Estrangelo Edessa"/>
+        <a:font script="Sora" typeface="Nirmala UI"/>
+        <a:font script="Tale" typeface="Microsoft Tai Le"/>
+        <a:font script="Talu" typeface="Microsoft New Tai Lue"/>
+        <a:font script="Tfng" typeface="Ebrima"/>
+      </a:majorFont>
+      <a:minorFont>
+        <a:latin typeface="Aptos" panose="02110004020202020204"/>
+        <a:ea typeface=""/>
+        <a:cs typeface=""/>
+        <a:font script="Jpan" typeface="游ゴシック"/>
+        <a:font script="Hang" typeface="맑은 고딕"/>
+        <a:font script="Hans" typeface="等线"/>
+        <a:font script="Hant" typeface="新細明體"/>
+        <a:font script="Arab" typeface="Arial"/>
+        <a:font script="Hebr" typeface="Arial"/>
+        <a:font script="Thai" typeface="Cordia New"/>
+        <a:font script="Ethi" typeface="Nyala"/>
+        <a:font script="Beng" typeface="Vrinda"/>
+        <a:font script="Gujr" typeface="Shruti"/>
+        <a:font script="Khmr" typeface="DaunPenh"/>
+        <a:font script="Knda" typeface="Tunga"/>
+        <a:font script="Guru" typeface="Raavi"/>
+        <a:font script="Cans" typeface="Euphemia"/>
+        <a:font script="Cher" typeface="Plantagenet Cherokee"/>
+        <a:font script="Yiii" typeface="Microsoft Yi Baiti"/>
+        <a:font script="Tibt" typeface="Microsoft Himalaya"/>
+        <a:font script="Thaa" typeface="MV Boli"/>
+        <a:font script="Deva" typeface="Mangal"/>
+        <a:font script="Telu" typeface="Gautami"/>
+        <a:font script="Taml" typeface="Latha"/>
+        <a:font script="Syrc" typeface="Estrangelo Edessa"/>
+        <a:font script="Orya" typeface="Kalinga"/>
+        <a:font script="Mlym" typeface="Kartika"/>
+        <a:font script="Laoo" typeface="DokChampa"/>
+        <a:font script="Sinh" typeface="Iskoola Pota"/>
+        <a:font script="Mong" typeface="Mongolian Baiti"/>
+        <a:font script="Viet" typeface="Arial"/>
+        <a:font script="Uigh" typeface="Microsoft Uighur"/>
+        <a:font script="Geor" typeface="Sylfaen"/>
+        <a:font script="Armn" typeface="Arial"/>
+        <a:font script="Bugi" typeface="Leelawadee UI"/>
+        <a:font script="Bopo" typeface="Microsoft JhengHei"/>
+        <a:font script="Java" typeface="Javanese Text"/>
+        <a:font script="Lisu" typeface="Segoe UI"/>
+        <a:font script="Mymr" typeface="Myanmar Text"/>
+        <a:font script="Nkoo" typeface="Ebrima"/>
+        <a:font script="Olck" typeface="Nirmala UI"/>
+        <a:font script="Osma" typeface="Ebrima"/>
+        <a:font script="Phag" typeface="Phagspa"/>
+        <a:font script="Syrn" typeface="Estrangelo Edessa"/>
+        <a:font script="Syrj" typeface="Estrangelo Edessa"/>
+        <a:font script="Syre" typeface="Estrangelo Edessa"/>
+        <a:font script="Sora" typeface="Nirmala UI"/>
+        <a:font script="Tale" typeface="Microsoft Tai Le"/>
+        <a:font script="Talu" typeface="Microsoft New Tai Lue"/>
+        <a:font script="Tfng" typeface="Ebrima"/>
+      </a:minorFont>
+    </a:fontScheme>
+    <a:fmtScheme name="Office">
+      <a:fillStyleLst>
+        <a:solidFill>
+          <a:schemeClr val="phClr"/>
+        </a:solidFill>
+        <a:gradFill rotWithShape="1">
+          <a:gsLst>
+            <a:gs pos="0">
+              <a:schemeClr val="phClr">
+                <a:lumMod val="110000"/>
+                <a:satMod val="105000"/>
+                <a:tint val="67000"/>
+              </a:schemeClr>
+            </a:gs>
+            <a:gs pos="50000">
+              <a:schemeClr val="phClr">
+                <a:lumMod val="105000"/>
+                <a:satMod val="103000"/>
+                <a:tint val="73000"/>
+              </a:schemeClr>
+            </a:gs>
+            <a:gs pos="100000">
+              <a:schemeClr val="phClr">
+                <a:lumMod val="105000"/>
+                <a:satMod val="109000"/>
+                <a:tint val="81000"/>
+              </a:schemeClr>
+            </a:gs>
+          </a:gsLst>
+          <a:lin ang="5400000" scaled="0"/>
+        </a:gradFill>
+        <a:gradFill rotWithShape="1">
+          <a:gsLst>
+            <a:gs pos="0">
+              <a:schemeClr val="phClr">
+                <a:satMod val="103000"/>
+                <a:lumMod val="102000"/>
+                <a:tint val="94000"/>
+              </a:schemeClr>
+            </a:gs>
+            <a:gs pos="50000">
+              <a:schemeClr val="phClr">
+                <a:satMod val="110000"/>
+                <a:lumMod val="100000"/>
+                <a:shade val="100000"/>
+              </a:schemeClr>
+            </a:gs>
+            <a:gs pos="100000">
+              <a:schemeClr val="phClr">
+                <a:lumMod val="99000"/>
+                <a:satMod val="120000"/>
+                <a:shade val="78000"/>
+              </a:schemeClr>
+            </a:gs>
+          </a:gsLst>
+          <a:lin ang="5400000" scaled="0"/>
+        </a:gradFill>
+      </a:fillStyleLst>
+      <a:lnStyleLst>
+        <a:ln w="12700" cap="flat" cmpd="sng" algn="ctr">
+          <a:solidFill>
+            <a:schemeClr val="phClr"/>
+          </a:solidFill>
+          <a:prstDash val="solid"/>
+          <a:miter lim="800000"/>
+        </a:ln>
+        <a:ln w="19050" cap="flat" cmpd="sng" algn="ctr">
+          <a:solidFill>
+            <a:schemeClr val="phClr"/>
+          </a:solidFill>
+          <a:prstDash val="solid"/>
+          <a:miter lim="800000"/>
+        </a:ln>
+        <a:ln w="25400" cap="flat" cmpd="sng" algn="ctr">
+          <a:solidFill>
+            <a:schemeClr val="phClr"/>
+          </a:solidFill>
+          <a:prstDash val="solid"/>
+          <a:miter lim="800000"/>
+        </a:ln>
+      </a:lnStyleLst>
+      <a:effectStyleLst>
+        <a:effectStyle>
+          <a:effectLst/>
+        </a:effectStyle>
+        <a:effectStyle>
+          <a:effectLst/>
+        </a:effectStyle>
+        <a:effectStyle>
+          <a:effectLst>
+            <a:outerShdw blurRad="57150" dist="19050" dir="5400000" algn="ctr" rotWithShape="0">
+              <a:srgbClr val="000000">
+                <a:alpha val="63000"/>
+              </a:srgbClr>
+            </a:outerShdw>
+          </a:effectLst>
+        </a:effectStyle>
+      </a:effectStyleLst>
+      <a:bgFillStyleLst>
+        <a:solidFill>
+          <a:schemeClr val="phClr"/>
+        </a:solidFill>
+        <a:solidFill>
+          <a:schemeClr val="phClr">
+            <a:tint val="95000"/>
+            <a:satMod val="170000"/>
+          </a:schemeClr>
+        </a:solidFill>
+        <a:gradFill rotWithShape="1">
+          <a:gsLst>
+            <a:gs pos="0">
+              <a:schemeClr val="phClr">
+                <a:tint val="93000"/>
+                <a:satMod val="150000"/>
+                <a:shade val="98000"/>
+                <a:lumMod val="102000"/>
+              </a:schemeClr>
+            </a:gs>
+            <a:gs pos="50000">
+              <a:schemeClr val="phClr">
+                <a:tint val="98000"/>
+                <a:satMod val="130000"/>
+                <a:shade val="90000"/>
+                <a:lumMod val="103000"/>
+              </a:schemeClr>
+            </a:gs>
+            <a:gs pos="100000">
+              <a:schemeClr val="phClr">
+                <a:shade val="63000"/>
+                <a:satMod val="120000"/>
+              </a:schemeClr>
+            </a:gs>
+          </a:gsLst>
+          <a:lin ang="5400000" scaled="0"/>
+        </a:gradFill>
+      </a:bgFillStyleLst>
+    </a:fmtScheme>
+  </a:themeElements>
+  <a:objectDefaults>
+    <a:lnDef>
+      <a:spPr/>
+      <a:bodyPr/>
+      <a:lstStyle/>
+      <a:style>
+        <a:lnRef idx="2">
+          <a:schemeClr val="accent1"/>
+        </a:lnRef>
+        <a:fillRef idx="0">
+          <a:schemeClr val="accent1"/>
+        </a:fillRef>
+        <a:effectRef idx="1">
+          <a:schemeClr val="accent1"/>
+        </a:effectRef>
+        <a:fontRef idx="minor">
+          <a:schemeClr val="tx1"/>
+        </a:fontRef>
+      </a:style>
+    </a:lnDef>
+  </a:objectDefaults>
+  <a:extraClrSchemeLst/>
+  <a:extLst>
+    <a:ext uri="{05A4C25C-085E-4340-85A3-A5531E510DB2}">
+      <thm15:themeFamily xmlns:thm15="http://schemas.microsoft.com/office/thememl/2012/main" name="Office Theme" id="{2E142A2C-CD16-42D6-873A-C26D2A0506FA}" vid="{1BDDFF52-6CD6-40A5-AB3C-68EB2F1E4D0A}"/>
+    </a:ext>
+  </a:extLst>
+</a:theme>
 </file>
--- a/doc/IOCFC26/forecastSegmentation.pptx
+++ b/doc/IOCFC26/forecastSegmentation.pptx
@@ -221,7 +221,7 @@
           <a:p>
             <a:fld id="{B4875DD0-DE0A-4E46-A4B1-4A7CC1FFB8A4}" type="datetimeFigureOut">
               <a:rPr lang="en-US" smtClean="0"/>
-              <a:t>9/12/2026</a:t>
+              <a:t>9/17/2026</a:t>
             </a:fld>
             <a:endParaRPr lang="en-US"/>
           </a:p>
@@ -33042,7 +33042,15 @@
             </a:pPr>
             <a:r>
               <a:rPr lang="en-US" sz="2000" dirty="0"/>
-              <a:t>Current changepoint detection methods are designed to </a:t>
+              <a:t>Current </a:t>
+            </a:r>
+            <a:r>
+              <a:rPr lang="en-US" sz="2000" b="1" i="1" dirty="0"/>
+              <a:t>changepoint detection </a:t>
+            </a:r>
+            <a:r>
+              <a:rPr lang="en-US" sz="2000" dirty="0"/>
+              <a:t>methods are designed to </a:t>
             </a:r>
             <a:r>
               <a:rPr lang="en-US" sz="2000" dirty="0">
@@ -33077,7 +33085,15 @@
             </a:pPr>
             <a:r>
               <a:rPr lang="en-US" sz="2000" dirty="0"/>
-              <a:t>Even regime-switching models are built for description, not forecasting.</a:t>
+              <a:t>Even </a:t>
+            </a:r>
+            <a:r>
+              <a:rPr lang="en-US" sz="2000" b="1" i="1" dirty="0"/>
+              <a:t>regime-switching</a:t>
+            </a:r>
+            <a:r>
+              <a:rPr lang="en-US" sz="2000" dirty="0"/>
+              <a:t> models are built for description, not forecasting.</a:t>
             </a:r>
           </a:p>
           <a:p>
@@ -33244,6 +33260,276 @@
   <p:clrMapOvr>
     <a:masterClrMapping/>
   </p:clrMapOvr>
+  <p:timing>
+    <p:tnLst>
+      <p:par>
+        <p:cTn id="1" dur="indefinite" restart="never" nodeType="tmRoot">
+          <p:childTnLst>
+            <p:seq concurrent="1" nextAc="seek">
+              <p:cTn id="2" dur="indefinite" nodeType="mainSeq">
+                <p:childTnLst>
+                  <p:par>
+                    <p:cTn id="3" fill="hold">
+                      <p:stCondLst>
+                        <p:cond delay="indefinite"/>
+                      </p:stCondLst>
+                      <p:childTnLst>
+                        <p:par>
+                          <p:cTn id="4" fill="hold">
+                            <p:stCondLst>
+                              <p:cond delay="0"/>
+                            </p:stCondLst>
+                            <p:childTnLst>
+                              <p:par>
+                                <p:cTn id="5" presetID="1" presetClass="entr" presetSubtype="0" fill="hold" nodeType="clickEffect">
+                                  <p:stCondLst>
+                                    <p:cond delay="0"/>
+                                  </p:stCondLst>
+                                  <p:childTnLst>
+                                    <p:set>
+                                      <p:cBhvr>
+                                        <p:cTn id="6" dur="1" fill="hold">
+                                          <p:stCondLst>
+                                            <p:cond delay="0"/>
+                                          </p:stCondLst>
+                                        </p:cTn>
+                                        <p:tgtEl>
+                                          <p:spTgt spid="2">
+                                            <p:txEl>
+                                              <p:pRg st="1" end="1"/>
+                                            </p:txEl>
+                                          </p:spTgt>
+                                        </p:tgtEl>
+                                        <p:attrNameLst>
+                                          <p:attrName>style.visibility</p:attrName>
+                                        </p:attrNameLst>
+                                      </p:cBhvr>
+                                      <p:to>
+                                        <p:strVal val="visible"/>
+                                      </p:to>
+                                    </p:set>
+                                  </p:childTnLst>
+                                </p:cTn>
+                              </p:par>
+                            </p:childTnLst>
+                          </p:cTn>
+                        </p:par>
+                      </p:childTnLst>
+                    </p:cTn>
+                  </p:par>
+                  <p:par>
+                    <p:cTn id="7" fill="hold">
+                      <p:stCondLst>
+                        <p:cond delay="indefinite"/>
+                      </p:stCondLst>
+                      <p:childTnLst>
+                        <p:par>
+                          <p:cTn id="8" fill="hold">
+                            <p:stCondLst>
+                              <p:cond delay="0"/>
+                            </p:stCondLst>
+                            <p:childTnLst>
+                              <p:par>
+                                <p:cTn id="9" presetID="1" presetClass="entr" presetSubtype="0" fill="hold" nodeType="clickEffect">
+                                  <p:stCondLst>
+                                    <p:cond delay="0"/>
+                                  </p:stCondLst>
+                                  <p:childTnLst>
+                                    <p:set>
+                                      <p:cBhvr>
+                                        <p:cTn id="10" dur="1" fill="hold">
+                                          <p:stCondLst>
+                                            <p:cond delay="0"/>
+                                          </p:stCondLst>
+                                        </p:cTn>
+                                        <p:tgtEl>
+                                          <p:spTgt spid="2">
+                                            <p:txEl>
+                                              <p:pRg st="2" end="2"/>
+                                            </p:txEl>
+                                          </p:spTgt>
+                                        </p:tgtEl>
+                                        <p:attrNameLst>
+                                          <p:attrName>style.visibility</p:attrName>
+                                        </p:attrNameLst>
+                                      </p:cBhvr>
+                                      <p:to>
+                                        <p:strVal val="visible"/>
+                                      </p:to>
+                                    </p:set>
+                                  </p:childTnLst>
+                                </p:cTn>
+                              </p:par>
+                              <p:par>
+                                <p:cTn id="11" presetID="1" presetClass="entr" presetSubtype="0" fill="hold" nodeType="withEffect">
+                                  <p:stCondLst>
+                                    <p:cond delay="0"/>
+                                  </p:stCondLst>
+                                  <p:childTnLst>
+                                    <p:set>
+                                      <p:cBhvr>
+                                        <p:cTn id="12" dur="1" fill="hold">
+                                          <p:stCondLst>
+                                            <p:cond delay="0"/>
+                                          </p:stCondLst>
+                                        </p:cTn>
+                                        <p:tgtEl>
+                                          <p:spTgt spid="2">
+                                            <p:txEl>
+                                              <p:pRg st="3" end="3"/>
+                                            </p:txEl>
+                                          </p:spTgt>
+                                        </p:tgtEl>
+                                        <p:attrNameLst>
+                                          <p:attrName>style.visibility</p:attrName>
+                                        </p:attrNameLst>
+                                      </p:cBhvr>
+                                      <p:to>
+                                        <p:strVal val="visible"/>
+                                      </p:to>
+                                    </p:set>
+                                  </p:childTnLst>
+                                </p:cTn>
+                              </p:par>
+                              <p:par>
+                                <p:cTn id="13" presetID="1" presetClass="entr" presetSubtype="0" fill="hold" nodeType="withEffect">
+                                  <p:stCondLst>
+                                    <p:cond delay="0"/>
+                                  </p:stCondLst>
+                                  <p:childTnLst>
+                                    <p:set>
+                                      <p:cBhvr>
+                                        <p:cTn id="14" dur="1" fill="hold">
+                                          <p:stCondLst>
+                                            <p:cond delay="0"/>
+                                          </p:stCondLst>
+                                        </p:cTn>
+                                        <p:tgtEl>
+                                          <p:spTgt spid="2">
+                                            <p:txEl>
+                                              <p:pRg st="4" end="4"/>
+                                            </p:txEl>
+                                          </p:spTgt>
+                                        </p:tgtEl>
+                                        <p:attrNameLst>
+                                          <p:attrName>style.visibility</p:attrName>
+                                        </p:attrNameLst>
+                                      </p:cBhvr>
+                                      <p:to>
+                                        <p:strVal val="visible"/>
+                                      </p:to>
+                                    </p:set>
+                                  </p:childTnLst>
+                                </p:cTn>
+                              </p:par>
+                              <p:par>
+                                <p:cTn id="15" presetID="1" presetClass="entr" presetSubtype="0" fill="hold" nodeType="withEffect">
+                                  <p:stCondLst>
+                                    <p:cond delay="0"/>
+                                  </p:stCondLst>
+                                  <p:childTnLst>
+                                    <p:set>
+                                      <p:cBhvr>
+                                        <p:cTn id="16" dur="1" fill="hold">
+                                          <p:stCondLst>
+                                            <p:cond delay="0"/>
+                                          </p:stCondLst>
+                                        </p:cTn>
+                                        <p:tgtEl>
+                                          <p:spTgt spid="2">
+                                            <p:txEl>
+                                              <p:pRg st="5" end="5"/>
+                                            </p:txEl>
+                                          </p:spTgt>
+                                        </p:tgtEl>
+                                        <p:attrNameLst>
+                                          <p:attrName>style.visibility</p:attrName>
+                                        </p:attrNameLst>
+                                      </p:cBhvr>
+                                      <p:to>
+                                        <p:strVal val="visible"/>
+                                      </p:to>
+                                    </p:set>
+                                  </p:childTnLst>
+                                </p:cTn>
+                              </p:par>
+                            </p:childTnLst>
+                          </p:cTn>
+                        </p:par>
+                      </p:childTnLst>
+                    </p:cTn>
+                  </p:par>
+                  <p:par>
+                    <p:cTn id="17" fill="hold">
+                      <p:stCondLst>
+                        <p:cond delay="indefinite"/>
+                      </p:stCondLst>
+                      <p:childTnLst>
+                        <p:par>
+                          <p:cTn id="18" fill="hold">
+                            <p:stCondLst>
+                              <p:cond delay="0"/>
+                            </p:stCondLst>
+                            <p:childTnLst>
+                              <p:par>
+                                <p:cTn id="19" presetID="1" presetClass="entr" presetSubtype="0" fill="hold" nodeType="clickEffect">
+                                  <p:stCondLst>
+                                    <p:cond delay="0"/>
+                                  </p:stCondLst>
+                                  <p:childTnLst>
+                                    <p:set>
+                                      <p:cBhvr>
+                                        <p:cTn id="20" dur="1" fill="hold">
+                                          <p:stCondLst>
+                                            <p:cond delay="0"/>
+                                          </p:stCondLst>
+                                        </p:cTn>
+                                        <p:tgtEl>
+                                          <p:spTgt spid="2">
+                                            <p:txEl>
+                                              <p:pRg st="6" end="6"/>
+                                            </p:txEl>
+                                          </p:spTgt>
+                                        </p:tgtEl>
+                                        <p:attrNameLst>
+                                          <p:attrName>style.visibility</p:attrName>
+                                        </p:attrNameLst>
+                                      </p:cBhvr>
+                                      <p:to>
+                                        <p:strVal val="visible"/>
+                                      </p:to>
+                                    </p:set>
+                                  </p:childTnLst>
+                                </p:cTn>
+                              </p:par>
+                            </p:childTnLst>
+                          </p:cTn>
+                        </p:par>
+                      </p:childTnLst>
+                    </p:cTn>
+                  </p:par>
+                </p:childTnLst>
+              </p:cTn>
+              <p:prevCondLst>
+                <p:cond evt="onPrev" delay="0">
+                  <p:tgtEl>
+                    <p:sldTgt/>
+                  </p:tgtEl>
+                </p:cond>
+              </p:prevCondLst>
+              <p:nextCondLst>
+                <p:cond evt="onNext" delay="0">
+                  <p:tgtEl>
+                    <p:sldTgt/>
+                  </p:tgtEl>
+                </p:cond>
+              </p:nextCondLst>
+            </p:seq>
+          </p:childTnLst>
+        </p:cTn>
+      </p:par>
+    </p:tnLst>
+  </p:timing>
 </p:sld>
 </file>
 
@@ -33264,8 +33550,8 @@
           <a:chExt cx="0" cy="0"/>
         </a:xfrm>
       </p:grpSpPr>
-      <mc:AlternateContent xmlns:mc="http://schemas.openxmlformats.org/markup-compatibility/2006">
-        <mc:Choice xmlns:a14="http://schemas.microsoft.com/office/drawing/2010/main" Requires="a14">
+      <mc:AlternateContent xmlns:mc="http://schemas.openxmlformats.org/markup-compatibility/2006" xmlns:a14="http://schemas.microsoft.com/office/drawing/2010/main">
+        <mc:Choice Requires="a14">
           <p:sp>
             <p:nvSpPr>
               <p:cNvPr id="2" name="Content Placeholder 1">
@@ -33827,7 +34113,7 @@
             </p:txBody>
           </p:sp>
         </mc:Choice>
-        <mc:Fallback>
+        <mc:Fallback xmlns="">
           <p:sp>
             <p:nvSpPr>
               <p:cNvPr id="2" name="Content Placeholder 1">
@@ -33962,8 +34248,8 @@
           <a:chExt cx="0" cy="0"/>
         </a:xfrm>
       </p:grpSpPr>
-      <mc:AlternateContent xmlns:mc="http://schemas.openxmlformats.org/markup-compatibility/2006">
-        <mc:Choice xmlns:a14="http://schemas.microsoft.com/office/drawing/2010/main" Requires="a14">
+      <mc:AlternateContent xmlns:mc="http://schemas.openxmlformats.org/markup-compatibility/2006" xmlns:a14="http://schemas.microsoft.com/office/drawing/2010/main">
+        <mc:Choice Requires="a14">
           <p:sp>
             <p:nvSpPr>
               <p:cNvPr id="2" name="Content Placeholder 1">
@@ -34952,7 +35238,7 @@
             </p:txBody>
           </p:sp>
         </mc:Choice>
-        <mc:Fallback>
+        <mc:Fallback xmlns="">
           <p:sp>
             <p:nvSpPr>
               <p:cNvPr id="2" name="Content Placeholder 1">
